--- a/slides/19_ML_intro.pptx
+++ b/slides/19_ML_intro.pptx
@@ -5,10 +5,10 @@
     <p:sldMasterId id="2147483769" r:id="rId1"/>
   </p:sldMasterIdLst>
   <p:notesMasterIdLst>
-    <p:notesMasterId r:id="rId35"/>
+    <p:notesMasterId r:id="rId38"/>
   </p:notesMasterIdLst>
   <p:handoutMasterIdLst>
-    <p:handoutMasterId r:id="rId36"/>
+    <p:handoutMasterId r:id="rId39"/>
   </p:handoutMasterIdLst>
   <p:sldIdLst>
     <p:sldId id="455" r:id="rId2"/>
@@ -35,20 +35,23 @@
     <p:sldId id="413" r:id="rId23"/>
     <p:sldId id="505" r:id="rId24"/>
     <p:sldId id="493" r:id="rId25"/>
-    <p:sldId id="514" r:id="rId26"/>
-    <p:sldId id="495" r:id="rId27"/>
-    <p:sldId id="489" r:id="rId28"/>
-    <p:sldId id="490" r:id="rId29"/>
-    <p:sldId id="491" r:id="rId30"/>
-    <p:sldId id="506" r:id="rId31"/>
-    <p:sldId id="517" r:id="rId32"/>
-    <p:sldId id="508" r:id="rId33"/>
-    <p:sldId id="515" r:id="rId34"/>
+    <p:sldId id="518" r:id="rId26"/>
+    <p:sldId id="514" r:id="rId27"/>
+    <p:sldId id="495" r:id="rId28"/>
+    <p:sldId id="489" r:id="rId29"/>
+    <p:sldId id="490" r:id="rId30"/>
+    <p:sldId id="491" r:id="rId31"/>
+    <p:sldId id="506" r:id="rId32"/>
+    <p:sldId id="517" r:id="rId33"/>
+    <p:sldId id="519" r:id="rId34"/>
+    <p:sldId id="508" r:id="rId35"/>
+    <p:sldId id="520" r:id="rId36"/>
+    <p:sldId id="515" r:id="rId37"/>
   </p:sldIdLst>
   <p:sldSz cx="12192000" cy="6858000"/>
   <p:notesSz cx="7099300" cy="10234613"/>
   <p:custDataLst>
-    <p:tags r:id="rId37"/>
+    <p:tags r:id="rId40"/>
   </p:custDataLst>
   <p:defaultTextStyle>
     <a:defPPr>
@@ -190,6 +193,7 @@
           <p14:sldIdLst>
             <p14:sldId id="505"/>
             <p14:sldId id="493"/>
+            <p14:sldId id="518"/>
             <p14:sldId id="514"/>
             <p14:sldId id="495"/>
             <p14:sldId id="489"/>
@@ -197,11 +201,13 @@
             <p14:sldId id="491"/>
             <p14:sldId id="506"/>
             <p14:sldId id="517"/>
+            <p14:sldId id="519"/>
           </p14:sldIdLst>
         </p14:section>
         <p14:section name="How are models used in AI" id="{C564B212-4CB4-4076-B86F-55C18B0F30DD}">
           <p14:sldIdLst>
             <p14:sldId id="508"/>
+            <p14:sldId id="520"/>
             <p14:sldId id="515"/>
           </p14:sldIdLst>
         </p14:section>
@@ -14657,7 +14663,7 @@
                       <a:rPr lang="en-US" b="0" i="1" smtClean="0">
                         <a:latin typeface="Cambria Math" panose="02040503050406030204" pitchFamily="18" charset="0"/>
                       </a:rPr>
-                      <m:t>h</m:t>
+                      <m:t>ℎ</m:t>
                     </m:r>
                     <m:r>
                       <a:rPr lang="en-US" b="0" i="1" smtClean="0">
@@ -14716,7 +14722,7 @@
                         <m:d>
                           <m:dPr>
                             <m:ctrlPr>
-                              <a:rPr lang="en-US" b="0" i="1" smtClean="0">
+                              <a:rPr lang="en-US" b="1" i="1" smtClean="0">
                                 <a:latin typeface="Cambria Math" panose="02040503050406030204" pitchFamily="18" charset="0"/>
                               </a:rPr>
                             </m:ctrlPr>
@@ -14788,7 +14794,7 @@
                           <a:rPr lang="en-US" b="0" i="1" smtClean="0">
                             <a:latin typeface="Cambria Math" panose="02040503050406030204" pitchFamily="18" charset="0"/>
                           </a:rPr>
-                          <m:t>h</m:t>
+                          <m:t>ℎ</m:t>
                         </m:r>
                         <m:r>
                           <a:rPr lang="en-US" b="0" i="1" smtClean="0">
@@ -14832,11 +14838,11 @@
                     <m:oMathParaPr>
                       <m:jc m:val="center"/>
                     </m:oMathParaPr>
-                    <m:oMath xmlns:m="http://schemas.openxmlformats.org/officeDocument/2006/math">
+                    <m:oMath>
                       <m:sSup>
                         <m:sSupPr>
                           <m:ctrlPr>
-                            <a:rPr lang="en-US" b="0" i="1" dirty="0" smtClean="0">
+                            <a:rPr lang="en-US" b="0" i="1" smtClean="0">
                               <a:latin typeface="Cambria Math" panose="02040503050406030204" pitchFamily="18" charset="0"/>
                             </a:rPr>
                           </m:ctrlPr>
@@ -14846,7 +14852,7 @@
                             <a:rPr lang="en-US" b="0" i="1" smtClean="0">
                               <a:latin typeface="Cambria Math" panose="02040503050406030204" pitchFamily="18" charset="0"/>
                             </a:rPr>
-                            <m:t>h</m:t>
+                            <m:t>ℎ</m:t>
                           </m:r>
                         </m:e>
                         <m:sup>
@@ -14876,7 +14882,7 @@
                           <m:limLow>
                             <m:limLowPr>
                               <m:ctrlPr>
-                                <a:rPr lang="en-US" b="0" i="1" dirty="0" smtClean="0">
+                                <a:rPr lang="en-US" b="0" i="0" dirty="0" smtClean="0">
                                   <a:latin typeface="Cambria Math" panose="02040503050406030204" pitchFamily="18" charset="0"/>
                                 </a:rPr>
                               </m:ctrlPr>
@@ -14897,7 +14903,7 @@
                                 <a:rPr lang="en-US" b="0" i="1" dirty="0" smtClean="0">
                                   <a:latin typeface="Cambria Math" panose="02040503050406030204" pitchFamily="18" charset="0"/>
                                 </a:rPr>
-                                <m:t>h</m:t>
+                                <m:t>ℎ</m:t>
                               </m:r>
                               <m:r>
                                 <a:rPr lang="en-US" b="0" i="1" dirty="0" smtClean="0">
@@ -14968,7 +14974,7 @@
                             <a:rPr lang="en-US" b="0" i="1" smtClean="0">
                               <a:latin typeface="Cambria Math" panose="02040503050406030204" pitchFamily="18" charset="0"/>
                             </a:rPr>
-                            <m:t>h</m:t>
+                            <m:t>ℎ</m:t>
                           </m:r>
                           <m:r>
                             <a:rPr lang="en-US" b="0" i="1" smtClean="0">
@@ -14999,7 +15005,7 @@
                     <m:sSup>
                       <m:sSupPr>
                         <m:ctrlPr>
-                          <a:rPr lang="en-US" b="0" i="1" dirty="0" smtClean="0">
+                          <a:rPr lang="en-US" b="0" i="1" smtClean="0">
                             <a:latin typeface="Cambria Math" panose="02040503050406030204" pitchFamily="18" charset="0"/>
                           </a:rPr>
                         </m:ctrlPr>
@@ -15009,7 +15015,7 @@
                           <a:rPr lang="en-US" b="0" i="1" smtClean="0">
                             <a:latin typeface="Cambria Math" panose="02040503050406030204" pitchFamily="18" charset="0"/>
                           </a:rPr>
-                          <m:t>h</m:t>
+                          <m:t>ℎ</m:t>
                         </m:r>
                       </m:e>
                       <m:sup>
@@ -15387,7 +15393,7 @@
             </a:ln>
             <a:extLst>
               <a:ext uri="{AF507438-7753-43e0-B8FC-AC1667EBCBE1}">
-                <a14:hiddenEffects xmlns:a14="http://schemas.microsoft.com/office/drawing/2010/main" xmlns="">
+                <a14:hiddenEffects xmlns="" xmlns:a14="http://schemas.microsoft.com/office/drawing/2010/main">
                   <a:effectLst>
                     <a:outerShdw dist="35921" dir="2700000" algn="ctr" rotWithShape="0">
                       <a:schemeClr val="bg2"/>
@@ -15455,7 +15461,7 @@
             <a:effectLst/>
             <a:extLst>
               <a:ext uri="{AF507438-7753-43e0-B8FC-AC1667EBCBE1}">
-                <a14:hiddenEffects xmlns:a14="http://schemas.microsoft.com/office/drawing/2010/main" xmlns="">
+                <a14:hiddenEffects xmlns="" xmlns:a14="http://schemas.microsoft.com/office/drawing/2010/main">
                   <a:effectLst>
                     <a:outerShdw dist="35921" dir="2700000" algn="ctr" rotWithShape="0">
                       <a:schemeClr val="bg2"/>
@@ -15509,7 +15515,7 @@
             <a:effectLst/>
             <a:extLst>
               <a:ext uri="{AF507438-7753-43e0-B8FC-AC1667EBCBE1}">
-                <a14:hiddenEffects xmlns:a14="http://schemas.microsoft.com/office/drawing/2010/main" xmlns="">
+                <a14:hiddenEffects xmlns="" xmlns:a14="http://schemas.microsoft.com/office/drawing/2010/main">
                   <a:effectLst>
                     <a:outerShdw dist="35921" dir="2700000" algn="ctr" rotWithShape="0">
                       <a:schemeClr val="bg2"/>
@@ -15562,12 +15568,12 @@
             <a:effectLst/>
             <a:extLst>
               <a:ext uri="{909E8E84-426E-40dd-AFC4-6F175D3DCCD1}">
-                <a14:hiddenFill xmlns:a14="http://schemas.microsoft.com/office/drawing/2010/main" xmlns="">
+                <a14:hiddenFill xmlns="" xmlns:a14="http://schemas.microsoft.com/office/drawing/2010/main">
                   <a:noFill/>
                 </a14:hiddenFill>
               </a:ext>
               <a:ext uri="{AF507438-7753-43e0-B8FC-AC1667EBCBE1}">
-                <a14:hiddenEffects xmlns:a14="http://schemas.microsoft.com/office/drawing/2010/main" xmlns="">
+                <a14:hiddenEffects xmlns="" xmlns:a14="http://schemas.microsoft.com/office/drawing/2010/main">
                   <a:effectLst>
                     <a:outerShdw dist="35921" dir="2700000" algn="ctr" rotWithShape="0">
                       <a:schemeClr val="bg2"/>
@@ -15641,14 +15647,14 @@
             <a:effectLst/>
             <a:extLst>
               <a:ext uri="{909E8E84-426E-40dd-AFC4-6F175D3DCCD1}">
-                <a14:hiddenFill xmlns:a14="http://schemas.microsoft.com/office/drawing/2010/main" xmlns="">
+                <a14:hiddenFill xmlns="" xmlns:a14="http://schemas.microsoft.com/office/drawing/2010/main">
                   <a:solidFill>
                     <a:schemeClr val="accent1"/>
                   </a:solidFill>
                 </a14:hiddenFill>
               </a:ext>
               <a:ext uri="{91240B29-F687-4f45-9708-019B960494DF}">
-                <a14:hiddenLine xmlns:a14="http://schemas.microsoft.com/office/drawing/2010/main" xmlns="" w="9525">
+                <a14:hiddenLine xmlns="" xmlns:a14="http://schemas.microsoft.com/office/drawing/2010/main" w="9525">
                   <a:solidFill>
                     <a:schemeClr val="tx1"/>
                   </a:solidFill>
@@ -15658,7 +15664,7 @@
                 </a14:hiddenLine>
               </a:ext>
               <a:ext uri="{AF507438-7753-43e0-B8FC-AC1667EBCBE1}">
-                <a14:hiddenEffects xmlns:a14="http://schemas.microsoft.com/office/drawing/2010/main" xmlns="">
+                <a14:hiddenEffects xmlns="" xmlns:a14="http://schemas.microsoft.com/office/drawing/2010/main">
                   <a:effectLst>
                     <a:outerShdw dist="35921" dir="2700000" algn="ctr" rotWithShape="0">
                       <a:schemeClr val="bg2"/>
@@ -15702,10 +15708,7 @@
                   <a:pPr/>
                   <a14:m>
                     <m:oMathPara xmlns:m="http://schemas.openxmlformats.org/officeDocument/2006/math">
-                      <m:oMathParaPr>
-                        <m:jc m:val="centerGroup"/>
-                      </m:oMathParaPr>
-                      <m:oMath xmlns:m="http://schemas.openxmlformats.org/officeDocument/2006/math">
+                      <m:oMath>
                         <m:r>
                           <a:rPr lang="en-US" sz="2400" b="0" i="1" dirty="0" smtClean="0">
                             <a:latin typeface="Cambria Math" panose="02040503050406030204" pitchFamily="18" charset="0"/>
@@ -15798,10 +15801,7 @@
                   <a:pPr/>
                   <a14:m>
                     <m:oMathPara xmlns:m="http://schemas.openxmlformats.org/officeDocument/2006/math">
-                      <m:oMathParaPr>
-                        <m:jc m:val="centerGroup"/>
-                      </m:oMathParaPr>
-                      <m:oMath xmlns:m="http://schemas.openxmlformats.org/officeDocument/2006/math">
+                      <m:oMath>
                         <m:sSup>
                           <m:sSupPr>
                             <m:ctrlPr>
@@ -15815,7 +15815,7 @@
                               <a:rPr lang="en-US" sz="3200" b="0" i="1" smtClean="0">
                                 <a:latin typeface="Cambria Math" panose="02040503050406030204" pitchFamily="18" charset="0"/>
                               </a:rPr>
-                              <m:t>h</m:t>
+                              <m:t>ℎ</m:t>
                             </m:r>
                           </m:e>
                           <m:sup>
@@ -16447,10 +16447,7 @@
                 </a:br>
                 <a14:m>
                   <m:oMathPara xmlns:m="http://schemas.openxmlformats.org/officeDocument/2006/math">
-                    <m:oMathParaPr>
-                      <m:jc m:val="centerGroup"/>
-                    </m:oMathParaPr>
-                    <m:oMath xmlns:m="http://schemas.openxmlformats.org/officeDocument/2006/math">
+                    <m:oMath>
                       <m:sSup>
                         <m:sSupPr>
                           <m:ctrlPr>
@@ -16464,7 +16461,7 @@
                             <a:rPr lang="en-US" b="0" i="1" smtClean="0">
                               <a:latin typeface="Cambria Math" panose="02040503050406030204" pitchFamily="18" charset="0"/>
                             </a:rPr>
-                            <m:t>h</m:t>
+                            <m:t>ℎ</m:t>
                           </m:r>
                         </m:e>
                         <m:sup>
@@ -16497,7 +16494,7 @@
                       <m:limLow>
                         <m:limLowPr>
                           <m:ctrlPr>
-                            <a:rPr lang="en-US" i="1">
+                            <a:rPr lang="en-US">
                               <a:latin typeface="Cambria Math" panose="02040503050406030204" pitchFamily="18" charset="0"/>
                             </a:rPr>
                           </m:ctrlPr>
@@ -16603,7 +16600,7 @@
                       <m:limLow>
                         <m:limLowPr>
                           <m:ctrlPr>
-                            <a:rPr lang="en-US" i="1">
+                            <a:rPr lang="en-US">
                               <a:latin typeface="Cambria Math" panose="02040503050406030204" pitchFamily="18" charset="0"/>
                             </a:rPr>
                           </m:ctrlPr>
@@ -16637,7 +16634,7 @@
                       <m:f>
                         <m:fPr>
                           <m:ctrlPr>
-                            <a:rPr lang="en-US" b="0" i="1" smtClean="0">
+                            <a:rPr lang="en-US" i="1">
                               <a:latin typeface="Cambria Math" panose="02040503050406030204" pitchFamily="18" charset="0"/>
                             </a:rPr>
                           </m:ctrlPr>
@@ -16653,7 +16650,7 @@
                             <m:dPr>
                               <m:endChr m:val="|"/>
                               <m:ctrlPr>
-                                <a:rPr lang="en-US" i="1">
+                                <a:rPr lang="en-US" b="1" i="1" smtClean="0">
                                   <a:latin typeface="Cambria Math" panose="02040503050406030204" pitchFamily="18" charset="0"/>
                                 </a:rPr>
                               </m:ctrlPr>
@@ -16768,7 +16765,7 @@
                           <m:limLow>
                             <m:limLowPr>
                               <m:ctrlPr>
-                                <a:rPr lang="en-US" i="1">
+                                <a:rPr lang="en-US">
                                   <a:latin typeface="Cambria Math" panose="02040503050406030204" pitchFamily="18" charset="0"/>
                                 </a:rPr>
                               </m:ctrlPr>
@@ -16805,7 +16802,7 @@
                             <m:dPr>
                               <m:endChr m:val="|"/>
                               <m:ctrlPr>
-                                <a:rPr lang="en-US" i="1">
+                                <a:rPr lang="en-US" b="1" i="1" smtClean="0">
                                   <a:latin typeface="Cambria Math" panose="02040503050406030204" pitchFamily="18" charset="0"/>
                                 </a:rPr>
                               </m:ctrlPr>
@@ -16966,7 +16963,7 @@
                       <m:dPr>
                         <m:endChr m:val="|"/>
                         <m:ctrlPr>
-                          <a:rPr lang="en-US" i="1">
+                          <a:rPr lang="en-US" b="1" i="1" smtClean="0">
                             <a:latin typeface="Cambria Math" panose="02040503050406030204" pitchFamily="18" charset="0"/>
                           </a:rPr>
                         </m:ctrlPr>
@@ -17020,7 +17017,7 @@
                     <m:d>
                       <m:dPr>
                         <m:ctrlPr>
-                          <a:rPr lang="en-US" i="1" dirty="0">
+                          <a:rPr lang="en-US" b="0" i="1" dirty="0" smtClean="0">
                             <a:latin typeface="Cambria Math" panose="02040503050406030204" pitchFamily="18" charset="0"/>
                           </a:rPr>
                         </m:ctrlPr>
@@ -17593,7 +17590,7 @@
                     <m:sSup>
                       <m:sSupPr>
                         <m:ctrlPr>
-                          <a:rPr lang="en-US" b="0" i="1" dirty="0" smtClean="0">
+                          <a:rPr lang="en-US" b="0" i="1" smtClean="0">
                             <a:latin typeface="Cambria Math" panose="02040503050406030204" pitchFamily="18" charset="0"/>
                           </a:rPr>
                         </m:ctrlPr>
@@ -17603,7 +17600,7 @@
                           <a:rPr lang="en-US" b="0" i="1" smtClean="0">
                             <a:latin typeface="Cambria Math" panose="02040503050406030204" pitchFamily="18" charset="0"/>
                           </a:rPr>
-                          <m:t>h</m:t>
+                          <m:t>ℎ</m:t>
                         </m:r>
                       </m:e>
                       <m:sup>
@@ -17633,7 +17630,7 @@
                         <m:limLow>
                           <m:limLowPr>
                             <m:ctrlPr>
-                              <a:rPr lang="en-US" b="0" i="1" dirty="0" smtClean="0">
+                              <a:rPr lang="en-US" b="0" i="0" dirty="0" smtClean="0">
                                 <a:latin typeface="Cambria Math" panose="02040503050406030204" pitchFamily="18" charset="0"/>
                               </a:rPr>
                             </m:ctrlPr>
@@ -17654,7 +17651,7 @@
                               <a:rPr lang="en-US" b="0" i="1" dirty="0" smtClean="0">
                                 <a:latin typeface="Cambria Math" panose="02040503050406030204" pitchFamily="18" charset="0"/>
                               </a:rPr>
-                              <m:t>h</m:t>
+                              <m:t>ℎ</m:t>
                             </m:r>
                             <m:r>
                               <a:rPr lang="en-US" b="0" i="1" dirty="0" smtClean="0">
@@ -17683,7 +17680,7 @@
                             <m:begChr m:val="["/>
                             <m:endChr m:val="]"/>
                             <m:ctrlPr>
-                              <a:rPr lang="en-US" b="0" i="1" dirty="0" smtClean="0">
+                              <a:rPr lang="en-US" i="1">
                                 <a:latin typeface="Cambria Math" panose="02040503050406030204" pitchFamily="18" charset="0"/>
                               </a:rPr>
                             </m:ctrlPr>
@@ -17742,19 +17739,13 @@
                               <a:rPr lang="en-US" i="1">
                                 <a:latin typeface="Cambria Math" panose="02040503050406030204" pitchFamily="18" charset="0"/>
                               </a:rPr>
-                              <m:t>h</m:t>
+                              <m:t>ℎ</m:t>
                             </m:r>
                             <m:r>
                               <a:rPr lang="en-US" i="1">
                                 <a:latin typeface="Cambria Math" panose="02040503050406030204" pitchFamily="18" charset="0"/>
                               </a:rPr>
-                              <m:t>)</m:t>
-                            </m:r>
-                            <m:r>
-                              <a:rPr lang="en-US">
-                                <a:latin typeface="Cambria Math" panose="02040503050406030204" pitchFamily="18" charset="0"/>
-                              </a:rPr>
-                              <m:t>+</m:t>
+                              <m:t>)+</m:t>
                             </m:r>
                             <m:r>
                               <a:rPr lang="en-US" i="1">
@@ -17784,7 +17775,7 @@
                               <a:rPr lang="en-US" i="1">
                                 <a:latin typeface="Cambria Math" panose="02040503050406030204" pitchFamily="18" charset="0"/>
                               </a:rPr>
-                              <m:t>h</m:t>
+                              <m:t>ℎ</m:t>
                             </m:r>
                             <m:r>
                               <a:rPr lang="en-US" b="0" i="1" smtClean="0">
@@ -18667,7 +18658,7 @@
                     <m:sSup>
                       <m:sSupPr>
                         <m:ctrlPr>
-                          <a:rPr lang="en-US" b="0" i="1" dirty="0" smtClean="0">
+                          <a:rPr lang="en-US" i="1" dirty="0" smtClean="0">
                             <a:latin typeface="Cambria Math" panose="02040503050406030204" pitchFamily="18" charset="0"/>
                           </a:rPr>
                         </m:ctrlPr>
@@ -18677,7 +18668,7 @@
                           <a:rPr lang="en-US" i="1" dirty="0" smtClean="0">
                             <a:latin typeface="Cambria Math" panose="02040503050406030204" pitchFamily="18" charset="0"/>
                           </a:rPr>
-                          <m:t>h</m:t>
+                          <m:t>ℎ</m:t>
                         </m:r>
                       </m:e>
                       <m:sup>
@@ -24597,7 +24588,7 @@
                       <a:rPr lang="en-US" i="1">
                         <a:latin typeface="Cambria Math" panose="02040503050406030204" pitchFamily="18" charset="0"/>
                       </a:rPr>
-                      <m:t>h</m:t>
+                      <m:t>ℎ</m:t>
                     </m:r>
                     <m:r>
                       <a:rPr lang="en-US" i="1">
@@ -24656,7 +24647,7 @@
                         <m:d>
                           <m:dPr>
                             <m:ctrlPr>
-                              <a:rPr lang="en-US" i="1">
+                              <a:rPr lang="en-US" b="1" i="1">
                                 <a:latin typeface="Cambria Math" panose="02040503050406030204" pitchFamily="18" charset="0"/>
                               </a:rPr>
                             </m:ctrlPr>
@@ -24728,7 +24719,7 @@
                           <a:rPr lang="en-US" i="1">
                             <a:latin typeface="Cambria Math" panose="02040503050406030204" pitchFamily="18" charset="0"/>
                           </a:rPr>
-                          <m:t>h</m:t>
+                          <m:t>ℎ</m:t>
                         </m:r>
                         <m:r>
                           <a:rPr lang="en-US" b="0" i="1" smtClean="0">
@@ -24807,7 +24798,7 @@
                           <a:rPr lang="en-US" sz="2400" i="1">
                             <a:latin typeface="Cambria Math" panose="02040503050406030204" pitchFamily="18" charset="0"/>
                           </a:rPr>
-                          <m:t>h</m:t>
+                          <m:t>ℎ</m:t>
                         </m:r>
                         <m:r>
                           <a:rPr lang="en-US" sz="2400" i="1">
@@ -24936,7 +24927,7 @@
                           <a:rPr lang="en-US" sz="2400" i="1">
                             <a:latin typeface="Cambria Math" panose="02040503050406030204" pitchFamily="18" charset="0"/>
                           </a:rPr>
-                          <m:t>h</m:t>
+                          <m:t>ℎ</m:t>
                         </m:r>
                         <m:r>
                           <a:rPr lang="en-US" sz="2400" b="0" i="1" smtClean="0">
@@ -25057,7 +25048,7 @@
                           <a:rPr lang="en-US" sz="2400" i="1">
                             <a:latin typeface="Cambria Math" panose="02040503050406030204" pitchFamily="18" charset="0"/>
                           </a:rPr>
-                          <m:t>h</m:t>
+                          <m:t>ℎ</m:t>
                         </m:r>
                       </m:e>
                     </m:d>
@@ -25265,10 +25256,7 @@
                 </a:br>
                 <a14:m>
                   <m:oMathPara xmlns:m="http://schemas.openxmlformats.org/officeDocument/2006/math">
-                    <m:oMathParaPr>
-                      <m:jc m:val="centerGroup"/>
-                    </m:oMathParaPr>
-                    <m:oMath xmlns:m="http://schemas.openxmlformats.org/officeDocument/2006/math">
+                    <m:oMath>
                       <m:r>
                         <a:rPr lang="en-US" b="0" i="1" smtClean="0">
                           <a:latin typeface="Cambria Math" panose="02040503050406030204" pitchFamily="18" charset="0"/>
@@ -27401,7 +27389,7 @@
                           <a:rPr lang="en-US" i="1">
                             <a:latin typeface="Cambria Math" panose="02040503050406030204" pitchFamily="18" charset="0"/>
                           </a:rPr>
-                          <m:t>h</m:t>
+                          <m:t>ℎ</m:t>
                         </m:r>
                       </m:e>
                       <m:sub>
@@ -27416,7 +27404,7 @@
                     <m:d>
                       <m:dPr>
                         <m:ctrlPr>
-                          <a:rPr lang="en-US" b="1" i="1">
+                          <a:rPr lang="en-US" b="1" i="1" smtClean="0">
                             <a:latin typeface="Cambria Math" panose="02040503050406030204" pitchFamily="18" charset="0"/>
                           </a:rPr>
                         </m:ctrlPr>
@@ -27663,7 +27651,7 @@
                     <m:sSup>
                       <m:sSupPr>
                         <m:ctrlPr>
-                          <a:rPr lang="en-US" i="1">
+                          <a:rPr lang="en-US" b="1" i="1">
                             <a:latin typeface="Cambria Math" panose="02040503050406030204" pitchFamily="18" charset="0"/>
                           </a:rPr>
                         </m:ctrlPr>
@@ -28164,7 +28152,7 @@
                     <m:sSup>
                       <m:sSupPr>
                         <m:ctrlPr>
-                          <a:rPr lang="en-US" i="1" smtClean="0">
+                          <a:rPr lang="en-US" b="1" i="1">
                             <a:latin typeface="Cambria Math" panose="02040503050406030204" pitchFamily="18" charset="0"/>
                           </a:rPr>
                         </m:ctrlPr>
@@ -28510,10 +28498,7 @@
                 </a:br>
                 <a14:m>
                   <m:oMathPara xmlns:m="http://schemas.openxmlformats.org/officeDocument/2006/math">
-                    <m:oMathParaPr>
-                      <m:jc m:val="centerGroup"/>
-                    </m:oMathParaPr>
-                    <m:oMath xmlns:m="http://schemas.openxmlformats.org/officeDocument/2006/math">
+                    <m:oMath>
                       <m:r>
                         <m:rPr>
                           <m:sty m:val="p"/>
@@ -28557,7 +28542,7 @@
                       <m:sSup>
                         <m:sSupPr>
                           <m:ctrlPr>
-                            <a:rPr lang="en-US" i="1" smtClean="0">
+                            <a:rPr lang="en-US" i="1">
                               <a:latin typeface="Cambria Math" panose="02040503050406030204" pitchFamily="18" charset="0"/>
                             </a:rPr>
                           </m:ctrlPr>
@@ -28579,6 +28564,7 @@
                                   <m:ctrlPr>
                                     <a:rPr lang="en-US" i="1">
                                       <a:latin typeface="Cambria Math" panose="02040503050406030204" pitchFamily="18" charset="0"/>
+                                      <a:ea typeface="Cambria Math" panose="02040503050406030204" pitchFamily="18" charset="0"/>
                                     </a:rPr>
                                   </m:ctrlPr>
                                 </m:fPr>
@@ -28668,6 +28654,7 @@
                                   <m:ctrlPr>
                                     <a:rPr lang="en-US" i="1">
                                       <a:latin typeface="Cambria Math" panose="02040503050406030204" pitchFamily="18" charset="0"/>
+                                      <a:ea typeface="Cambria Math" panose="02040503050406030204" pitchFamily="18" charset="0"/>
                                     </a:rPr>
                                   </m:ctrlPr>
                                 </m:fPr>
@@ -28764,6 +28751,7 @@
                                   <m:ctrlPr>
                                     <a:rPr lang="en-US" i="1">
                                       <a:latin typeface="Cambria Math" panose="02040503050406030204" pitchFamily="18" charset="0"/>
+                                      <a:ea typeface="Cambria Math" panose="02040503050406030204" pitchFamily="18" charset="0"/>
                                     </a:rPr>
                                   </m:ctrlPr>
                                 </m:fPr>
@@ -29166,10 +29154,7 @@
                   <a:pPr/>
                   <a14:m>
                     <m:oMathPara xmlns:m="http://schemas.openxmlformats.org/officeDocument/2006/math">
-                      <m:oMathParaPr>
-                        <m:jc m:val="centerGroup"/>
-                      </m:oMathParaPr>
-                      <m:oMath xmlns:m="http://schemas.openxmlformats.org/officeDocument/2006/math">
+                      <m:oMath>
                         <m:r>
                           <m:rPr>
                             <m:sty m:val="p"/>
@@ -29333,10 +29318,7 @@
                   <a:pPr/>
                   <a14:m>
                     <m:oMathPara xmlns:m="http://schemas.openxmlformats.org/officeDocument/2006/math">
-                      <m:oMathParaPr>
-                        <m:jc m:val="centerGroup"/>
-                      </m:oMathParaPr>
-                      <m:oMath xmlns:m="http://schemas.openxmlformats.org/officeDocument/2006/math">
+                      <m:oMath>
                         <m:r>
                           <a:rPr lang="en-US" b="1" i="1" smtClean="0">
                             <a:latin typeface="Cambria Math" panose="02040503050406030204" pitchFamily="18" charset="0"/>
@@ -29810,6 +29792,124 @@
           <p:cNvPr id="4" name="Title 3">
             <a:extLst>
               <a:ext uri="{FF2B5EF4-FFF2-40B4-BE49-F238E27FC236}">
+                <a16:creationId xmlns:a16="http://schemas.microsoft.com/office/drawing/2014/main" id="{24CD2877-1046-6123-CF1E-BE9F2D8536CB}"/>
+              </a:ext>
+            </a:extLst>
+          </p:cNvPr>
+          <p:cNvSpPr>
+            <a:spLocks noGrp="1"/>
+          </p:cNvSpPr>
+          <p:nvPr>
+            <p:ph type="title"/>
+          </p:nvPr>
+        </p:nvSpPr>
+        <p:spPr>
+          <a:xfrm>
+            <a:off x="762000" y="2931915"/>
+            <a:ext cx="10668000" cy="876035"/>
+          </a:xfrm>
+        </p:spPr>
+        <p:txBody>
+          <a:bodyPr>
+            <a:noAutofit/>
+          </a:bodyPr>
+          <a:lstStyle/>
+          <a:p>
+            <a:r>
+              <a:rPr lang="en-US" sz="3200" b="1" dirty="0">
+                <a:latin typeface="+mn-lt"/>
+              </a:rPr>
+              <a:t>Code example</a:t>
+            </a:r>
+            <a:r>
+              <a:rPr lang="en-US" sz="3200" dirty="0">
+                <a:latin typeface="+mn-lt"/>
+              </a:rPr>
+              <a:t>: Line Fitting with Gradient Descent and SGD</a:t>
+            </a:r>
+          </a:p>
+        </p:txBody>
+      </p:sp>
+      <p:sp>
+        <p:nvSpPr>
+          <p:cNvPr id="5" name="TextBox 4">
+            <a:extLst>
+              <a:ext uri="{FF2B5EF4-FFF2-40B4-BE49-F238E27FC236}">
+                <a16:creationId xmlns:a16="http://schemas.microsoft.com/office/drawing/2014/main" id="{5AA484FF-058C-4694-424C-0B3B26DF9F45}"/>
+              </a:ext>
+            </a:extLst>
+          </p:cNvPr>
+          <p:cNvSpPr txBox="1"/>
+          <p:nvPr/>
+        </p:nvSpPr>
+        <p:spPr>
+          <a:xfrm>
+            <a:off x="2417299" y="5365946"/>
+            <a:ext cx="6608298" cy="253916"/>
+          </a:xfrm>
+          <a:prstGeom prst="rect">
+            <a:avLst/>
+          </a:prstGeom>
+          <a:noFill/>
+        </p:spPr>
+        <p:txBody>
+          <a:bodyPr wrap="square" rtlCol="0">
+            <a:spAutoFit/>
+          </a:bodyPr>
+          <a:lstStyle/>
+          <a:p>
+            <a:r>
+              <a:rPr lang="en-US" sz="1050" dirty="0"/>
+              <a:t>See Code on </a:t>
+            </a:r>
+            <a:r>
+              <a:rPr lang="en-US" sz="1050" dirty="0">
+                <a:hlinkClick r:id="rId2"/>
+              </a:rPr>
+              <a:t>https://michael.hahsler.net/Introduction_to_Artificial_Intelligence/</a:t>
+            </a:r>
+            <a:r>
+              <a:rPr lang="en-US" sz="1050" dirty="0"/>
+              <a:t> </a:t>
+            </a:r>
+          </a:p>
+        </p:txBody>
+      </p:sp>
+    </p:spTree>
+    <p:extLst>
+      <p:ext uri="{BB962C8B-B14F-4D97-AF65-F5344CB8AC3E}">
+        <p14:creationId xmlns:p14="http://schemas.microsoft.com/office/powerpoint/2010/main" val="190193640"/>
+      </p:ext>
+    </p:extLst>
+  </p:cSld>
+  <p:clrMapOvr>
+    <a:masterClrMapping/>
+  </p:clrMapOvr>
+</p:sld>
+</file>
+
+<file path=ppt/slides/slide26.xml><?xml version="1.0" encoding="utf-8"?>
+<p:sld xmlns:a="http://schemas.openxmlformats.org/drawingml/2006/main" xmlns:r="http://schemas.openxmlformats.org/officeDocument/2006/relationships" xmlns:p="http://schemas.openxmlformats.org/presentationml/2006/main">
+  <p:cSld>
+    <p:spTree>
+      <p:nvGrpSpPr>
+        <p:cNvPr id="1" name=""/>
+        <p:cNvGrpSpPr/>
+        <p:nvPr/>
+      </p:nvGrpSpPr>
+      <p:grpSpPr>
+        <a:xfrm>
+          <a:off x="0" y="0"/>
+          <a:ext cx="0" cy="0"/>
+          <a:chOff x="0" y="0"/>
+          <a:chExt cx="0" cy="0"/>
+        </a:xfrm>
+      </p:grpSpPr>
+      <p:sp>
+        <p:nvSpPr>
+          <p:cNvPr id="4" name="Title 3">
+            <a:extLst>
+              <a:ext uri="{FF2B5EF4-FFF2-40B4-BE49-F238E27FC236}">
                 <a16:creationId xmlns:a16="http://schemas.microsoft.com/office/drawing/2014/main" id="{3CD65ADD-3424-5CC4-FB20-9034C29801A9}"/>
               </a:ext>
             </a:extLst>
@@ -29874,7 +29974,7 @@
 </p:sld>
 </file>
 
-<file path=ppt/slides/slide26.xml><?xml version="1.0" encoding="utf-8"?>
+<file path=ppt/slides/slide27.xml><?xml version="1.0" encoding="utf-8"?>
 <p:sld xmlns:a="http://schemas.openxmlformats.org/drawingml/2006/main" xmlns:r="http://schemas.openxmlformats.org/officeDocument/2006/relationships" xmlns:p="http://schemas.openxmlformats.org/presentationml/2006/main">
   <p:cSld>
     <p:spTree>
@@ -29987,12 +30087,12 @@
                       <a:rPr lang="en-US" b="0" i="1" smtClean="0">
                         <a:latin typeface="Cambria Math" panose="02040503050406030204" pitchFamily="18" charset="0"/>
                       </a:rPr>
-                      <m:t>h</m:t>
+                      <m:t>ℎ</m:t>
                     </m:r>
                     <m:d>
                       <m:dPr>
                         <m:ctrlPr>
-                          <a:rPr lang="en-US" b="0" i="1" smtClean="0">
+                          <a:rPr lang="en-US" b="1" i="1" smtClean="0">
                             <a:latin typeface="Cambria Math" panose="02040503050406030204" pitchFamily="18" charset="0"/>
                           </a:rPr>
                         </m:ctrlPr>
@@ -30015,7 +30115,7 @@
                     <m:func>
                       <m:funcPr>
                         <m:ctrlPr>
-                          <a:rPr lang="en-US" i="1" smtClean="0">
+                          <a:rPr lang="en-US" i="1">
                             <a:latin typeface="Cambria Math" panose="02040503050406030204" pitchFamily="18" charset="0"/>
                           </a:rPr>
                         </m:ctrlPr>
@@ -30024,7 +30124,7 @@
                         <m:limLow>
                           <m:limLowPr>
                             <m:ctrlPr>
-                              <a:rPr lang="en-US" i="1">
+                              <a:rPr lang="en-US">
                                 <a:latin typeface="Cambria Math" panose="02040503050406030204" pitchFamily="18" charset="0"/>
                               </a:rPr>
                             </m:ctrlPr>
@@ -30140,7 +30240,7 @@
                                 <m:sSub>
                                   <m:sSubPr>
                                     <m:ctrlPr>
-                                      <a:rPr lang="en-US" b="0" i="1" smtClean="0">
+                                      <a:rPr lang="en-US" b="1" i="1" smtClean="0">
                                         <a:latin typeface="Cambria Math" panose="02040503050406030204" pitchFamily="18" charset="0"/>
                                       </a:rPr>
                                     </m:ctrlPr>
@@ -30256,7 +30356,7 @@
                         <m:sSub>
                           <m:sSubPr>
                             <m:ctrlPr>
-                              <a:rPr lang="en-US" i="1">
+                              <a:rPr lang="en-US" b="1" i="1">
                                 <a:latin typeface="Cambria Math" panose="02040503050406030204" pitchFamily="18" charset="0"/>
                               </a:rPr>
                             </m:ctrlPr>
@@ -30356,10 +30456,7 @@
                 </a:pPr>
                 <a14:m>
                   <m:oMathPara xmlns:m="http://schemas.openxmlformats.org/officeDocument/2006/math">
-                    <m:oMathParaPr>
-                      <m:jc m:val="centerGroup"/>
-                    </m:oMathParaPr>
-                    <m:oMath xmlns:m="http://schemas.openxmlformats.org/officeDocument/2006/math">
+                    <m:oMath>
                       <m:r>
                         <a:rPr lang="en-US" b="0" i="1" smtClean="0">
                           <a:latin typeface="Cambria Math" panose="02040503050406030204" pitchFamily="18" charset="0"/>
@@ -30379,7 +30476,7 @@
                           <m:sSub>
                             <m:sSubPr>
                               <m:ctrlPr>
-                                <a:rPr lang="en-US" b="0" i="1" smtClean="0">
+                                <a:rPr lang="en-US" b="1" i="1" smtClean="0">
                                   <a:latin typeface="Cambria Math" panose="02040503050406030204" pitchFamily="18" charset="0"/>
                                 </a:rPr>
                               </m:ctrlPr>
@@ -30698,10 +30795,7 @@
                 <a:pPr/>
                 <a14:m>
                   <m:oMathPara xmlns:m="http://schemas.openxmlformats.org/officeDocument/2006/math">
-                    <m:oMathParaPr>
-                      <m:jc m:val="centerGroup"/>
-                    </m:oMathParaPr>
-                    <m:oMath xmlns:m="http://schemas.openxmlformats.org/officeDocument/2006/math">
+                    <m:oMath>
                       <m:sSup>
                         <m:sSupPr>
                           <m:ctrlPr>
@@ -30715,7 +30809,7 @@
                             <a:rPr lang="en-US" b="0" i="1" smtClean="0">
                               <a:latin typeface="Cambria Math" panose="02040503050406030204" pitchFamily="18" charset="0"/>
                             </a:rPr>
-                            <m:t>h</m:t>
+                            <m:t>ℎ</m:t>
                           </m:r>
                         </m:e>
                         <m:sup>
@@ -30748,7 +30842,7 @@
                       <m:limLow>
                         <m:limLowPr>
                           <m:ctrlPr>
-                            <a:rPr lang="en-US" i="1">
+                            <a:rPr lang="en-US">
                               <a:latin typeface="Cambria Math" panose="02040503050406030204" pitchFamily="18" charset="0"/>
                             </a:rPr>
                           </m:ctrlPr>
@@ -31027,7 +31121,7 @@
 </p:sld>
 </file>
 
-<file path=ppt/slides/slide27.xml><?xml version="1.0" encoding="utf-8"?>
+<file path=ppt/slides/slide28.xml><?xml version="1.0" encoding="utf-8"?>
 <p:sld xmlns:a="http://schemas.openxmlformats.org/drawingml/2006/main" xmlns:r="http://schemas.openxmlformats.org/officeDocument/2006/relationships" xmlns:p="http://schemas.openxmlformats.org/presentationml/2006/main">
   <p:cSld>
     <p:spTree>
@@ -31163,7 +31257,7 @@
                       <a:rPr lang="en-US" b="0" i="1" smtClean="0">
                         <a:latin typeface="Cambria Math" panose="02040503050406030204" pitchFamily="18" charset="0"/>
                       </a:rPr>
-                      <m:t>h</m:t>
+                      <m:t>ℎ</m:t>
                     </m:r>
                     <m:r>
                       <a:rPr lang="en-US" b="0" i="1" smtClean="0">
@@ -31195,7 +31289,7 @@
                         <m:limLow>
                           <m:limLowPr>
                             <m:ctrlPr>
-                              <a:rPr lang="en-US" i="1">
+                              <a:rPr lang="en-US">
                                 <a:latin typeface="Cambria Math" panose="02040503050406030204" pitchFamily="18" charset="0"/>
                               </a:rPr>
                             </m:ctrlPr>
@@ -31487,10 +31581,7 @@
                 <a:pPr/>
                 <a14:m>
                   <m:oMathPara xmlns:m="http://schemas.openxmlformats.org/officeDocument/2006/math">
-                    <m:oMathParaPr>
-                      <m:jc m:val="centerGroup"/>
-                    </m:oMathParaPr>
-                    <m:oMath xmlns:m="http://schemas.openxmlformats.org/officeDocument/2006/math">
+                    <m:oMath>
                       <m:sSup>
                         <m:sSupPr>
                           <m:ctrlPr>
@@ -31504,7 +31595,7 @@
                             <a:rPr lang="en-US" b="0" i="1" smtClean="0">
                               <a:latin typeface="Cambria Math" panose="02040503050406030204" pitchFamily="18" charset="0"/>
                             </a:rPr>
-                            <m:t>h</m:t>
+                            <m:t>ℎ</m:t>
                           </m:r>
                         </m:e>
                         <m:sup>
@@ -31537,7 +31628,7 @@
                       <m:limLow>
                         <m:limLowPr>
                           <m:ctrlPr>
-                            <a:rPr lang="en-US" i="1">
+                            <a:rPr lang="en-US">
                               <a:latin typeface="Cambria Math" panose="02040503050406030204" pitchFamily="18" charset="0"/>
                             </a:rPr>
                           </m:ctrlPr>
@@ -31751,7 +31842,7 @@
                       <m:accPr>
                         <m:chr m:val="̂"/>
                         <m:ctrlPr>
-                          <a:rPr lang="en-US" sz="1100" i="1" dirty="0" smtClean="0">
+                          <a:rPr lang="en-US" sz="1100" b="0" i="1" dirty="0" smtClean="0">
                             <a:latin typeface="Cambria Math" panose="02040503050406030204" pitchFamily="18" charset="0"/>
                           </a:rPr>
                         </m:ctrlPr>
@@ -31768,7 +31859,7 @@
                     <m:d>
                       <m:dPr>
                         <m:ctrlPr>
-                          <a:rPr lang="en-US" sz="1100" i="1" dirty="0" smtClean="0">
+                          <a:rPr lang="en-US" sz="1100" b="0" i="0" dirty="0" smtClean="0">
                             <a:latin typeface="Cambria Math" panose="02040503050406030204" pitchFamily="18" charset="0"/>
                           </a:rPr>
                         </m:ctrlPr>
@@ -31801,25 +31892,7 @@
                           <a:rPr lang="en-US" sz="1100" b="0" i="0" dirty="0" smtClean="0">
                             <a:latin typeface="Cambria Math" panose="02040503050406030204" pitchFamily="18" charset="0"/>
                           </a:rPr>
-                          <m:t>node</m:t>
-                        </m:r>
-                        <m:r>
-                          <m:rPr>
-                            <m:nor/>
-                          </m:rPr>
-                          <a:rPr lang="en-US" sz="1100" b="0" i="0" dirty="0" smtClean="0">
-                            <a:latin typeface="Cambria Math" panose="02040503050406030204" pitchFamily="18" charset="0"/>
-                          </a:rPr>
-                          <m:t> </m:t>
-                        </m:r>
-                        <m:r>
-                          <m:rPr>
-                            <m:nor/>
-                          </m:rPr>
-                          <a:rPr lang="en-US" sz="1100" b="0" i="0" dirty="0" smtClean="0">
-                            <a:latin typeface="Cambria Math" panose="02040503050406030204" pitchFamily="18" charset="0"/>
-                          </a:rPr>
-                          <m:t>N</m:t>
+                          <m:t>node N</m:t>
                         </m:r>
                       </m:e>
                     </m:d>
@@ -32125,7 +32198,7 @@
 </p:sld>
 </file>
 
-<file path=ppt/slides/slide28.xml><?xml version="1.0" encoding="utf-8"?>
+<file path=ppt/slides/slide29.xml><?xml version="1.0" encoding="utf-8"?>
 <p:sld xmlns:a="http://schemas.openxmlformats.org/drawingml/2006/main" xmlns:r="http://schemas.openxmlformats.org/officeDocument/2006/relationships" xmlns:p="http://schemas.openxmlformats.org/presentationml/2006/main">
   <p:cSld>
     <p:spTree>
@@ -32264,7 +32337,7 @@
                       <a:rPr lang="en-US" i="1">
                         <a:latin typeface="Cambria Math" panose="02040503050406030204" pitchFamily="18" charset="0"/>
                       </a:rPr>
-                      <m:t>h</m:t>
+                      <m:t>ℎ</m:t>
                     </m:r>
                     <m:r>
                       <a:rPr lang="en-US" i="1">
@@ -32296,7 +32369,7 @@
                         <m:limLow>
                           <m:limLowPr>
                             <m:ctrlPr>
-                              <a:rPr lang="en-US" i="1">
+                              <a:rPr lang="en-US">
                                 <a:latin typeface="Cambria Math" panose="02040503050406030204" pitchFamily="18" charset="0"/>
                               </a:rPr>
                             </m:ctrlPr>
@@ -32546,10 +32619,7 @@
                 <a:pPr/>
                 <a14:m>
                   <m:oMathPara xmlns:m="http://schemas.openxmlformats.org/officeDocument/2006/math">
-                    <m:oMathParaPr>
-                      <m:jc m:val="centerGroup"/>
-                    </m:oMathParaPr>
-                    <m:oMath xmlns:m="http://schemas.openxmlformats.org/officeDocument/2006/math">
+                    <m:oMath>
                       <m:sSup>
                         <m:sSupPr>
                           <m:ctrlPr>
@@ -32563,7 +32633,7 @@
                             <a:rPr lang="en-US" b="0" i="1" smtClean="0">
                               <a:latin typeface="Cambria Math" panose="02040503050406030204" pitchFamily="18" charset="0"/>
                             </a:rPr>
-                            <m:t>h</m:t>
+                            <m:t>ℎ</m:t>
                           </m:r>
                         </m:e>
                         <m:sup>
@@ -32596,7 +32666,7 @@
                       <m:limLow>
                         <m:limLowPr>
                           <m:ctrlPr>
-                            <a:rPr lang="en-US" i="1">
+                            <a:rPr lang="en-US">
                               <a:latin typeface="Cambria Math" panose="02040503050406030204" pitchFamily="18" charset="0"/>
                             </a:rPr>
                           </m:ctrlPr>
@@ -32891,7 +32961,171 @@
 </p:sld>
 </file>
 
-<file path=ppt/slides/slide29.xml><?xml version="1.0" encoding="utf-8"?>
+<file path=ppt/slides/slide3.xml><?xml version="1.0" encoding="utf-8"?>
+<p:sld xmlns:a="http://schemas.openxmlformats.org/drawingml/2006/main" xmlns:r="http://schemas.openxmlformats.org/officeDocument/2006/relationships" xmlns:p="http://schemas.openxmlformats.org/presentationml/2006/main">
+  <p:cSld>
+    <p:spTree>
+      <p:nvGrpSpPr>
+        <p:cNvPr id="1" name="">
+          <a:extLst>
+            <a:ext uri="{FF2B5EF4-FFF2-40B4-BE49-F238E27FC236}">
+              <a16:creationId xmlns:a16="http://schemas.microsoft.com/office/drawing/2014/main" id="{BB24A43D-93C1-ABD3-A2E5-40B73B6ECC06}"/>
+            </a:ext>
+          </a:extLst>
+        </p:cNvPr>
+        <p:cNvGrpSpPr/>
+        <p:nvPr/>
+      </p:nvGrpSpPr>
+      <p:grpSpPr>
+        <a:xfrm>
+          <a:off x="0" y="0"/>
+          <a:ext cx="0" cy="0"/>
+          <a:chOff x="0" y="0"/>
+          <a:chExt cx="0" cy="0"/>
+        </a:xfrm>
+      </p:grpSpPr>
+      <p:sp>
+        <p:nvSpPr>
+          <p:cNvPr id="2" name="Title 1">
+            <a:extLst>
+              <a:ext uri="{FF2B5EF4-FFF2-40B4-BE49-F238E27FC236}">
+                <a16:creationId xmlns:a16="http://schemas.microsoft.com/office/drawing/2014/main" id="{EB85A4B6-D7DC-5913-84F9-79DC02BD043E}"/>
+              </a:ext>
+            </a:extLst>
+          </p:cNvPr>
+          <p:cNvSpPr>
+            <a:spLocks noGrp="1"/>
+          </p:cNvSpPr>
+          <p:nvPr>
+            <p:ph type="title"/>
+          </p:nvPr>
+        </p:nvSpPr>
+        <p:spPr>
+          <a:xfrm>
+            <a:off x="477980" y="1122363"/>
+            <a:ext cx="4932220" cy="3204134"/>
+          </a:xfrm>
+        </p:spPr>
+        <p:txBody>
+          <a:bodyPr vert="horz" lIns="91440" tIns="45720" rIns="91440" bIns="45720" rtlCol="0" anchor="b">
+            <a:normAutofit/>
+          </a:bodyPr>
+          <a:lstStyle/>
+          <a:p>
+            <a:r>
+              <a:rPr lang="en-US" sz="4800" kern="1200" dirty="0">
+                <a:solidFill>
+                  <a:schemeClr val="tx1"/>
+                </a:solidFill>
+                <a:latin typeface="+mj-lt"/>
+                <a:ea typeface="+mj-ea"/>
+                <a:cs typeface="+mj-cs"/>
+              </a:rPr>
+              <a:t>Agents and Machine Learning</a:t>
+            </a:r>
+          </a:p>
+        </p:txBody>
+      </p:sp>
+      <p:sp>
+        <p:nvSpPr>
+          <p:cNvPr id="7" name="TextBox 6">
+            <a:extLst>
+              <a:ext uri="{FF2B5EF4-FFF2-40B4-BE49-F238E27FC236}">
+                <a16:creationId xmlns:a16="http://schemas.microsoft.com/office/drawing/2014/main" id="{192FDFC1-1E91-863C-60E8-089AC78538B5}"/>
+              </a:ext>
+            </a:extLst>
+          </p:cNvPr>
+          <p:cNvSpPr txBox="1"/>
+          <p:nvPr/>
+        </p:nvSpPr>
+        <p:spPr>
+          <a:xfrm>
+            <a:off x="5715000" y="6081063"/>
+            <a:ext cx="5562600" cy="523220"/>
+          </a:xfrm>
+          <a:prstGeom prst="rect">
+            <a:avLst/>
+          </a:prstGeom>
+          <a:noFill/>
+        </p:spPr>
+        <p:txBody>
+          <a:bodyPr wrap="square" rtlCol="0">
+            <a:spAutoFit/>
+          </a:bodyPr>
+          <a:lstStyle/>
+          <a:p>
+            <a:pPr algn="ctr"/>
+            <a:r>
+              <a:rPr lang="en-US" sz="1400" dirty="0"/>
+              <a:t>DeepAi.org with prompt: “A happy cartoon robot with an artificial neural network for a brain on white background learning to play chess”</a:t>
+            </a:r>
+          </a:p>
+        </p:txBody>
+      </p:sp>
+      <p:pic>
+        <p:nvPicPr>
+          <p:cNvPr id="1034" name="Picture 10">
+            <a:extLst>
+              <a:ext uri="{FF2B5EF4-FFF2-40B4-BE49-F238E27FC236}">
+                <a16:creationId xmlns:a16="http://schemas.microsoft.com/office/drawing/2014/main" id="{0B3B5D91-7A9D-DC31-1696-410760A5AF47}"/>
+              </a:ext>
+              <a:ext uri="{C183D7F6-B498-43B3-948B-1728B52AA6E4}">
+                <adec:decorative xmlns:adec="http://schemas.microsoft.com/office/drawing/2017/decorative" val="1"/>
+              </a:ext>
+            </a:extLst>
+          </p:cNvPr>
+          <p:cNvPicPr>
+            <a:picLocks noChangeAspect="1" noChangeArrowheads="1"/>
+          </p:cNvPicPr>
+          <p:nvPr/>
+        </p:nvPicPr>
+        <p:blipFill>
+          <a:blip r:embed="rId2">
+            <a:extLst>
+              <a:ext uri="{28A0092B-C50C-407E-A947-70E740481C1C}">
+                <a14:useLocalDpi xmlns:a14="http://schemas.microsoft.com/office/drawing/2010/main" val="0"/>
+              </a:ext>
+            </a:extLst>
+          </a:blip>
+          <a:srcRect/>
+          <a:stretch>
+            <a:fillRect/>
+          </a:stretch>
+        </p:blipFill>
+        <p:spPr bwMode="auto">
+          <a:xfrm>
+            <a:off x="5524500" y="172099"/>
+            <a:ext cx="5943600" cy="5943600"/>
+          </a:xfrm>
+          <a:prstGeom prst="rect">
+            <a:avLst/>
+          </a:prstGeom>
+          <a:noFill/>
+          <a:extLst>
+            <a:ext uri="{909E8E84-426E-40DD-AFC4-6F175D3DCCD1}">
+              <a14:hiddenFill xmlns:a14="http://schemas.microsoft.com/office/drawing/2010/main">
+                <a:solidFill>
+                  <a:srgbClr val="FFFFFF"/>
+                </a:solidFill>
+              </a14:hiddenFill>
+            </a:ext>
+          </a:extLst>
+        </p:spPr>
+      </p:pic>
+    </p:spTree>
+    <p:extLst>
+      <p:ext uri="{BB962C8B-B14F-4D97-AF65-F5344CB8AC3E}">
+        <p14:creationId xmlns:p14="http://schemas.microsoft.com/office/powerpoint/2010/main" val="2256691729"/>
+      </p:ext>
+    </p:extLst>
+  </p:cSld>
+  <p:clrMapOvr>
+    <a:masterClrMapping/>
+  </p:clrMapOvr>
+</p:sld>
+</file>
+
+<file path=ppt/slides/slide30.xml><?xml version="1.0" encoding="utf-8"?>
 <p:sld xmlns:a="http://schemas.openxmlformats.org/drawingml/2006/main" xmlns:r="http://schemas.openxmlformats.org/officeDocument/2006/relationships" xmlns:p="http://schemas.openxmlformats.org/presentationml/2006/main" show="0">
   <p:cSld>
     <p:spTree>
@@ -33243,171 +33477,7 @@
 </p:sld>
 </file>
 
-<file path=ppt/slides/slide3.xml><?xml version="1.0" encoding="utf-8"?>
-<p:sld xmlns:a="http://schemas.openxmlformats.org/drawingml/2006/main" xmlns:r="http://schemas.openxmlformats.org/officeDocument/2006/relationships" xmlns:p="http://schemas.openxmlformats.org/presentationml/2006/main">
-  <p:cSld>
-    <p:spTree>
-      <p:nvGrpSpPr>
-        <p:cNvPr id="1" name="">
-          <a:extLst>
-            <a:ext uri="{FF2B5EF4-FFF2-40B4-BE49-F238E27FC236}">
-              <a16:creationId xmlns:a16="http://schemas.microsoft.com/office/drawing/2014/main" id="{BB24A43D-93C1-ABD3-A2E5-40B73B6ECC06}"/>
-            </a:ext>
-          </a:extLst>
-        </p:cNvPr>
-        <p:cNvGrpSpPr/>
-        <p:nvPr/>
-      </p:nvGrpSpPr>
-      <p:grpSpPr>
-        <a:xfrm>
-          <a:off x="0" y="0"/>
-          <a:ext cx="0" cy="0"/>
-          <a:chOff x="0" y="0"/>
-          <a:chExt cx="0" cy="0"/>
-        </a:xfrm>
-      </p:grpSpPr>
-      <p:sp>
-        <p:nvSpPr>
-          <p:cNvPr id="2" name="Title 1">
-            <a:extLst>
-              <a:ext uri="{FF2B5EF4-FFF2-40B4-BE49-F238E27FC236}">
-                <a16:creationId xmlns:a16="http://schemas.microsoft.com/office/drawing/2014/main" id="{EB85A4B6-D7DC-5913-84F9-79DC02BD043E}"/>
-              </a:ext>
-            </a:extLst>
-          </p:cNvPr>
-          <p:cNvSpPr>
-            <a:spLocks noGrp="1"/>
-          </p:cNvSpPr>
-          <p:nvPr>
-            <p:ph type="title"/>
-          </p:nvPr>
-        </p:nvSpPr>
-        <p:spPr>
-          <a:xfrm>
-            <a:off x="477980" y="1122363"/>
-            <a:ext cx="4932220" cy="3204134"/>
-          </a:xfrm>
-        </p:spPr>
-        <p:txBody>
-          <a:bodyPr vert="horz" lIns="91440" tIns="45720" rIns="91440" bIns="45720" rtlCol="0" anchor="b">
-            <a:normAutofit/>
-          </a:bodyPr>
-          <a:lstStyle/>
-          <a:p>
-            <a:r>
-              <a:rPr lang="en-US" sz="4800" kern="1200" dirty="0">
-                <a:solidFill>
-                  <a:schemeClr val="tx1"/>
-                </a:solidFill>
-                <a:latin typeface="+mj-lt"/>
-                <a:ea typeface="+mj-ea"/>
-                <a:cs typeface="+mj-cs"/>
-              </a:rPr>
-              <a:t>Agents and Machine Learning</a:t>
-            </a:r>
-          </a:p>
-        </p:txBody>
-      </p:sp>
-      <p:sp>
-        <p:nvSpPr>
-          <p:cNvPr id="7" name="TextBox 6">
-            <a:extLst>
-              <a:ext uri="{FF2B5EF4-FFF2-40B4-BE49-F238E27FC236}">
-                <a16:creationId xmlns:a16="http://schemas.microsoft.com/office/drawing/2014/main" id="{192FDFC1-1E91-863C-60E8-089AC78538B5}"/>
-              </a:ext>
-            </a:extLst>
-          </p:cNvPr>
-          <p:cNvSpPr txBox="1"/>
-          <p:nvPr/>
-        </p:nvSpPr>
-        <p:spPr>
-          <a:xfrm>
-            <a:off x="5715000" y="6081063"/>
-            <a:ext cx="5562600" cy="523220"/>
-          </a:xfrm>
-          <a:prstGeom prst="rect">
-            <a:avLst/>
-          </a:prstGeom>
-          <a:noFill/>
-        </p:spPr>
-        <p:txBody>
-          <a:bodyPr wrap="square" rtlCol="0">
-            <a:spAutoFit/>
-          </a:bodyPr>
-          <a:lstStyle/>
-          <a:p>
-            <a:pPr algn="ctr"/>
-            <a:r>
-              <a:rPr lang="en-US" sz="1400" dirty="0"/>
-              <a:t>DeepAi.org with prompt: “A happy cartoon robot with an artificial neural network for a brain on white background learning to play chess”</a:t>
-            </a:r>
-          </a:p>
-        </p:txBody>
-      </p:sp>
-      <p:pic>
-        <p:nvPicPr>
-          <p:cNvPr id="1034" name="Picture 10">
-            <a:extLst>
-              <a:ext uri="{FF2B5EF4-FFF2-40B4-BE49-F238E27FC236}">
-                <a16:creationId xmlns:a16="http://schemas.microsoft.com/office/drawing/2014/main" id="{0B3B5D91-7A9D-DC31-1696-410760A5AF47}"/>
-              </a:ext>
-              <a:ext uri="{C183D7F6-B498-43B3-948B-1728B52AA6E4}">
-                <adec:decorative xmlns:adec="http://schemas.microsoft.com/office/drawing/2017/decorative" val="1"/>
-              </a:ext>
-            </a:extLst>
-          </p:cNvPr>
-          <p:cNvPicPr>
-            <a:picLocks noChangeAspect="1" noChangeArrowheads="1"/>
-          </p:cNvPicPr>
-          <p:nvPr/>
-        </p:nvPicPr>
-        <p:blipFill>
-          <a:blip r:embed="rId2">
-            <a:extLst>
-              <a:ext uri="{28A0092B-C50C-407E-A947-70E740481C1C}">
-                <a14:useLocalDpi xmlns:a14="http://schemas.microsoft.com/office/drawing/2010/main" val="0"/>
-              </a:ext>
-            </a:extLst>
-          </a:blip>
-          <a:srcRect/>
-          <a:stretch>
-            <a:fillRect/>
-          </a:stretch>
-        </p:blipFill>
-        <p:spPr bwMode="auto">
-          <a:xfrm>
-            <a:off x="5524500" y="172099"/>
-            <a:ext cx="5943600" cy="5943600"/>
-          </a:xfrm>
-          <a:prstGeom prst="rect">
-            <a:avLst/>
-          </a:prstGeom>
-          <a:noFill/>
-          <a:extLst>
-            <a:ext uri="{909E8E84-426E-40DD-AFC4-6F175D3DCCD1}">
-              <a14:hiddenFill xmlns:a14="http://schemas.microsoft.com/office/drawing/2010/main">
-                <a:solidFill>
-                  <a:srgbClr val="FFFFFF"/>
-                </a:solidFill>
-              </a14:hiddenFill>
-            </a:ext>
-          </a:extLst>
-        </p:spPr>
-      </p:pic>
-    </p:spTree>
-    <p:extLst>
-      <p:ext uri="{BB962C8B-B14F-4D97-AF65-F5344CB8AC3E}">
-        <p14:creationId xmlns:p14="http://schemas.microsoft.com/office/powerpoint/2010/main" val="2256691729"/>
-      </p:ext>
-    </p:extLst>
-  </p:cSld>
-  <p:clrMapOvr>
-    <a:masterClrMapping/>
-  </p:clrMapOvr>
-</p:sld>
-</file>
-
-<file path=ppt/slides/slide30.xml><?xml version="1.0" encoding="utf-8"?>
+<file path=ppt/slides/slide31.xml><?xml version="1.0" encoding="utf-8"?>
 <p:sld xmlns:a="http://schemas.openxmlformats.org/drawingml/2006/main" xmlns:r="http://schemas.openxmlformats.org/officeDocument/2006/relationships" xmlns:p="http://schemas.openxmlformats.org/presentationml/2006/main">
   <p:cSld>
     <p:spTree>
@@ -34239,12 +34309,12 @@
                       <a:rPr lang="en-US" sz="1500" b="0" i="1" dirty="0" smtClean="0">
                         <a:latin typeface="Cambria Math" panose="02040503050406030204" pitchFamily="18" charset="0"/>
                       </a:rPr>
-                      <m:t>h</m:t>
+                      <m:t>ℎ</m:t>
                     </m:r>
                     <m:d>
                       <m:dPr>
                         <m:ctrlPr>
-                          <a:rPr lang="en-US" sz="1500" b="0" i="1" dirty="0" smtClean="0">
+                          <a:rPr lang="en-US" sz="1500" b="1" i="1" dirty="0" smtClean="0">
                             <a:latin typeface="Cambria Math" panose="02040503050406030204" pitchFamily="18" charset="0"/>
                           </a:rPr>
                         </m:ctrlPr>
@@ -34292,7 +34362,7 @@
                     <m:d>
                       <m:dPr>
                         <m:ctrlPr>
-                          <a:rPr lang="en-US" sz="1500" i="1">
+                          <a:rPr lang="en-US" sz="1500" b="0" i="1" smtClean="0">
                             <a:latin typeface="Cambria Math" panose="02040503050406030204" pitchFamily="18" charset="0"/>
                           </a:rPr>
                         </m:ctrlPr>
@@ -34301,7 +34371,7 @@
                         <m:sSup>
                           <m:sSupPr>
                             <m:ctrlPr>
-                              <a:rPr lang="en-US" sz="1500" b="0" i="1" smtClean="0">
+                              <a:rPr lang="en-US" sz="1500" b="1" i="1" smtClean="0">
                                 <a:latin typeface="Cambria Math" panose="02040503050406030204" pitchFamily="18" charset="0"/>
                               </a:rPr>
                             </m:ctrlPr>
@@ -34370,7 +34440,7 @@
                         <m:d>
                           <m:dPr>
                             <m:ctrlPr>
-                              <a:rPr lang="en-US" sz="1500" b="1" i="1">
+                              <a:rPr lang="en-US" sz="1500" b="1" i="1" smtClean="0">
                                 <a:latin typeface="Cambria Math" panose="02040503050406030204" pitchFamily="18" charset="0"/>
                               </a:rPr>
                             </m:ctrlPr>
@@ -35048,7 +35118,7 @@
 </p:sld>
 </file>
 
-<file path=ppt/slides/slide31.xml><?xml version="1.0" encoding="utf-8"?>
+<file path=ppt/slides/slide32.xml><?xml version="1.0" encoding="utf-8"?>
 <p:sld xmlns:a="http://schemas.openxmlformats.org/drawingml/2006/main" xmlns:r="http://schemas.openxmlformats.org/officeDocument/2006/relationships" xmlns:p="http://schemas.openxmlformats.org/presentationml/2006/main">
   <p:cSld>
     <p:spTree>
@@ -35945,7 +36015,131 @@
 </p:sld>
 </file>
 
-<file path=ppt/slides/slide32.xml><?xml version="1.0" encoding="utf-8"?>
+<file path=ppt/slides/slide33.xml><?xml version="1.0" encoding="utf-8"?>
+<p:sld xmlns:a="http://schemas.openxmlformats.org/drawingml/2006/main" xmlns:r="http://schemas.openxmlformats.org/officeDocument/2006/relationships" xmlns:p="http://schemas.openxmlformats.org/presentationml/2006/main">
+  <p:cSld>
+    <p:spTree>
+      <p:nvGrpSpPr>
+        <p:cNvPr id="1" name="">
+          <a:extLst>
+            <a:ext uri="{FF2B5EF4-FFF2-40B4-BE49-F238E27FC236}">
+              <a16:creationId xmlns:a16="http://schemas.microsoft.com/office/drawing/2014/main" id="{3F60B945-E1E2-87DA-1991-C5A6EC835FAE}"/>
+            </a:ext>
+          </a:extLst>
+        </p:cNvPr>
+        <p:cNvGrpSpPr/>
+        <p:nvPr/>
+      </p:nvGrpSpPr>
+      <p:grpSpPr>
+        <a:xfrm>
+          <a:off x="0" y="0"/>
+          <a:ext cx="0" cy="0"/>
+          <a:chOff x="0" y="0"/>
+          <a:chExt cx="0" cy="0"/>
+        </a:xfrm>
+      </p:grpSpPr>
+      <p:sp>
+        <p:nvSpPr>
+          <p:cNvPr id="4" name="Title 3">
+            <a:extLst>
+              <a:ext uri="{FF2B5EF4-FFF2-40B4-BE49-F238E27FC236}">
+                <a16:creationId xmlns:a16="http://schemas.microsoft.com/office/drawing/2014/main" id="{33113DD2-E833-DAAC-BBC0-D572829C0BD6}"/>
+              </a:ext>
+            </a:extLst>
+          </p:cNvPr>
+          <p:cNvSpPr>
+            <a:spLocks noGrp="1"/>
+          </p:cNvSpPr>
+          <p:nvPr>
+            <p:ph type="title"/>
+          </p:nvPr>
+        </p:nvSpPr>
+        <p:spPr>
+          <a:xfrm>
+            <a:off x="762000" y="2931915"/>
+            <a:ext cx="10515599" cy="876035"/>
+          </a:xfrm>
+        </p:spPr>
+        <p:txBody>
+          <a:bodyPr>
+            <a:noAutofit/>
+          </a:bodyPr>
+          <a:lstStyle/>
+          <a:p>
+            <a:r>
+              <a:rPr lang="en-US" sz="3200" b="1" dirty="0">
+                <a:latin typeface="+mn-lt"/>
+              </a:rPr>
+              <a:t>Code example</a:t>
+            </a:r>
+            <a:r>
+              <a:rPr lang="en-US" sz="3200" dirty="0">
+                <a:latin typeface="+mn-lt"/>
+              </a:rPr>
+              <a:t>: Learn to Score a Tic-Tac-Toe Board by Example</a:t>
+            </a:r>
+          </a:p>
+        </p:txBody>
+      </p:sp>
+      <p:sp>
+        <p:nvSpPr>
+          <p:cNvPr id="5" name="TextBox 4">
+            <a:extLst>
+              <a:ext uri="{FF2B5EF4-FFF2-40B4-BE49-F238E27FC236}">
+                <a16:creationId xmlns:a16="http://schemas.microsoft.com/office/drawing/2014/main" id="{43DF6E9B-5D96-DA07-AC68-BE7FACB775D6}"/>
+              </a:ext>
+            </a:extLst>
+          </p:cNvPr>
+          <p:cNvSpPr txBox="1"/>
+          <p:nvPr/>
+        </p:nvSpPr>
+        <p:spPr>
+          <a:xfrm>
+            <a:off x="2417299" y="5365946"/>
+            <a:ext cx="7477862" cy="253916"/>
+          </a:xfrm>
+          <a:prstGeom prst="rect">
+            <a:avLst/>
+          </a:prstGeom>
+          <a:noFill/>
+        </p:spPr>
+        <p:txBody>
+          <a:bodyPr wrap="square" rtlCol="0">
+            <a:spAutoFit/>
+          </a:bodyPr>
+          <a:lstStyle/>
+          <a:p>
+            <a:r>
+              <a:rPr lang="en-US" sz="1050" dirty="0"/>
+              <a:t>See Code on </a:t>
+            </a:r>
+            <a:r>
+              <a:rPr lang="en-US" sz="1050" dirty="0">
+                <a:hlinkClick r:id="rId2"/>
+              </a:rPr>
+              <a:t>https://michael.hahsler.net/Introduction_to_Artificial_Intelligence/</a:t>
+            </a:r>
+            <a:r>
+              <a:rPr lang="en-US" sz="1050" dirty="0"/>
+              <a:t> </a:t>
+            </a:r>
+          </a:p>
+        </p:txBody>
+      </p:sp>
+    </p:spTree>
+    <p:extLst>
+      <p:ext uri="{BB962C8B-B14F-4D97-AF65-F5344CB8AC3E}">
+        <p14:creationId xmlns:p14="http://schemas.microsoft.com/office/powerpoint/2010/main" val="2492430859"/>
+      </p:ext>
+    </p:extLst>
+  </p:cSld>
+  <p:clrMapOvr>
+    <a:masterClrMapping/>
+  </p:clrMapOvr>
+</p:sld>
+</file>
+
+<file path=ppt/slides/slide34.xml><?xml version="1.0" encoding="utf-8"?>
 <p:sld xmlns:a="http://schemas.openxmlformats.org/drawingml/2006/main" xmlns:r="http://schemas.openxmlformats.org/officeDocument/2006/relationships" xmlns:p="http://schemas.openxmlformats.org/presentationml/2006/main">
   <p:cSld>
     <p:spTree>
@@ -36294,10 +36488,7 @@
                   </a:pPr>
                   <a14:m>
                     <m:oMathPara xmlns:m="http://schemas.openxmlformats.org/officeDocument/2006/math">
-                      <m:oMathParaPr>
-                        <m:jc m:val="centerGroup"/>
-                      </m:oMathParaPr>
-                      <m:oMath xmlns:m="http://schemas.openxmlformats.org/officeDocument/2006/math">
+                      <m:oMath>
                         <m:r>
                           <a:rPr lang="en-US" sz="1400" b="0" i="1" kern="1200" smtClean="0">
                             <a:latin typeface="Cambria Math" panose="02040503050406030204" pitchFamily="18" charset="0"/>
@@ -36314,7 +36505,7 @@
                           <a:rPr lang="en-US" sz="1400" b="0" i="1" kern="1200" smtClean="0">
                             <a:latin typeface="Cambria Math" panose="02040503050406030204" pitchFamily="18" charset="0"/>
                           </a:rPr>
-                          <m:t>h</m:t>
+                          <m:t>ℎ</m:t>
                         </m:r>
                         <m:r>
                           <a:rPr lang="en-US" sz="1400" b="0" i="1" kern="1200" smtClean="0">
@@ -36805,10 +36996,7 @@
                   </a:pPr>
                   <a14:m>
                     <m:oMathPara xmlns:m="http://schemas.openxmlformats.org/officeDocument/2006/math">
-                      <m:oMathParaPr>
-                        <m:jc m:val="centerGroup"/>
-                      </m:oMathParaPr>
-                      <m:oMath xmlns:m="http://schemas.openxmlformats.org/officeDocument/2006/math">
+                      <m:oMath>
                         <m:r>
                           <a:rPr lang="en-US" sz="1400" b="0" i="1" kern="1200" smtClean="0">
                             <a:latin typeface="Cambria Math" panose="02040503050406030204" pitchFamily="18" charset="0"/>
@@ -36825,7 +37013,7 @@
                           <a:rPr lang="en-US" sz="1400" b="0" i="1" kern="1200" smtClean="0">
                             <a:latin typeface="Cambria Math" panose="02040503050406030204" pitchFamily="18" charset="0"/>
                           </a:rPr>
-                          <m:t>h</m:t>
+                          <m:t>ℎ</m:t>
                         </m:r>
                         <m:r>
                           <a:rPr lang="en-US" sz="1400" b="0" i="1" kern="1200" smtClean="0">
@@ -38109,7 +38297,131 @@
 </p:sld>
 </file>
 
-<file path=ppt/slides/slide33.xml><?xml version="1.0" encoding="utf-8"?>
+<file path=ppt/slides/slide35.xml><?xml version="1.0" encoding="utf-8"?>
+<p:sld xmlns:a="http://schemas.openxmlformats.org/drawingml/2006/main" xmlns:r="http://schemas.openxmlformats.org/officeDocument/2006/relationships" xmlns:p="http://schemas.openxmlformats.org/presentationml/2006/main">
+  <p:cSld>
+    <p:spTree>
+      <p:nvGrpSpPr>
+        <p:cNvPr id="1" name="">
+          <a:extLst>
+            <a:ext uri="{FF2B5EF4-FFF2-40B4-BE49-F238E27FC236}">
+              <a16:creationId xmlns:a16="http://schemas.microsoft.com/office/drawing/2014/main" id="{288DE397-E20B-2264-79B5-2894F2310ABB}"/>
+            </a:ext>
+          </a:extLst>
+        </p:cNvPr>
+        <p:cNvGrpSpPr/>
+        <p:nvPr/>
+      </p:nvGrpSpPr>
+      <p:grpSpPr>
+        <a:xfrm>
+          <a:off x="0" y="0"/>
+          <a:ext cx="0" cy="0"/>
+          <a:chOff x="0" y="0"/>
+          <a:chExt cx="0" cy="0"/>
+        </a:xfrm>
+      </p:grpSpPr>
+      <p:sp>
+        <p:nvSpPr>
+          <p:cNvPr id="4" name="Title 3">
+            <a:extLst>
+              <a:ext uri="{FF2B5EF4-FFF2-40B4-BE49-F238E27FC236}">
+                <a16:creationId xmlns:a16="http://schemas.microsoft.com/office/drawing/2014/main" id="{9ADC654E-2868-60DB-9B6F-058DEA86FD0E}"/>
+              </a:ext>
+            </a:extLst>
+          </p:cNvPr>
+          <p:cNvSpPr>
+            <a:spLocks noGrp="1"/>
+          </p:cNvSpPr>
+          <p:nvPr>
+            <p:ph type="title"/>
+          </p:nvPr>
+        </p:nvSpPr>
+        <p:spPr>
+          <a:xfrm>
+            <a:off x="685800" y="2931915"/>
+            <a:ext cx="10896600" cy="876035"/>
+          </a:xfrm>
+        </p:spPr>
+        <p:txBody>
+          <a:bodyPr>
+            <a:noAutofit/>
+          </a:bodyPr>
+          <a:lstStyle/>
+          <a:p>
+            <a:r>
+              <a:rPr lang="en-US" sz="3200" b="1" dirty="0">
+                <a:latin typeface="+mn-lt"/>
+              </a:rPr>
+              <a:t>Code example</a:t>
+            </a:r>
+            <a:r>
+              <a:rPr lang="en-US" sz="3200" dirty="0">
+                <a:latin typeface="+mn-lt"/>
+              </a:rPr>
+              <a:t>: Machine Learning with Python using scikit-learn</a:t>
+            </a:r>
+          </a:p>
+        </p:txBody>
+      </p:sp>
+      <p:sp>
+        <p:nvSpPr>
+          <p:cNvPr id="5" name="TextBox 4">
+            <a:extLst>
+              <a:ext uri="{FF2B5EF4-FFF2-40B4-BE49-F238E27FC236}">
+                <a16:creationId xmlns:a16="http://schemas.microsoft.com/office/drawing/2014/main" id="{CE1AE763-203C-79E6-EB5E-657191307B27}"/>
+              </a:ext>
+            </a:extLst>
+          </p:cNvPr>
+          <p:cNvSpPr txBox="1"/>
+          <p:nvPr/>
+        </p:nvSpPr>
+        <p:spPr>
+          <a:xfrm>
+            <a:off x="2417299" y="5365946"/>
+            <a:ext cx="6608298" cy="253916"/>
+          </a:xfrm>
+          <a:prstGeom prst="rect">
+            <a:avLst/>
+          </a:prstGeom>
+          <a:noFill/>
+        </p:spPr>
+        <p:txBody>
+          <a:bodyPr wrap="square" rtlCol="0">
+            <a:spAutoFit/>
+          </a:bodyPr>
+          <a:lstStyle/>
+          <a:p>
+            <a:r>
+              <a:rPr lang="en-US" sz="1050" dirty="0"/>
+              <a:t>See Code on </a:t>
+            </a:r>
+            <a:r>
+              <a:rPr lang="en-US" sz="1050" dirty="0">
+                <a:hlinkClick r:id="rId2"/>
+              </a:rPr>
+              <a:t>https://michael.hahsler.net/Introduction_to_Artificial_Intelligence/</a:t>
+            </a:r>
+            <a:r>
+              <a:rPr lang="en-US" sz="1050" dirty="0"/>
+              <a:t> </a:t>
+            </a:r>
+          </a:p>
+        </p:txBody>
+      </p:sp>
+    </p:spTree>
+    <p:extLst>
+      <p:ext uri="{BB962C8B-B14F-4D97-AF65-F5344CB8AC3E}">
+        <p14:creationId xmlns:p14="http://schemas.microsoft.com/office/powerpoint/2010/main" val="2152989362"/>
+      </p:ext>
+    </p:extLst>
+  </p:cSld>
+  <p:clrMapOvr>
+    <a:masterClrMapping/>
+  </p:clrMapOvr>
+</p:sld>
+</file>
+
+<file path=ppt/slides/slide36.xml><?xml version="1.0" encoding="utf-8"?>
 <p:sld xmlns:a="http://schemas.openxmlformats.org/drawingml/2006/main" xmlns:r="http://schemas.openxmlformats.org/officeDocument/2006/relationships" xmlns:p="http://schemas.openxmlformats.org/presentationml/2006/main">
   <p:cSld>
     <p:bg>
@@ -40338,10 +40650,7 @@
                         <a:pPr/>
                         <a14:m>
                           <m:oMathPara xmlns:m="http://schemas.openxmlformats.org/officeDocument/2006/math">
-                            <m:oMathParaPr>
-                              <m:jc m:val="centerGroup"/>
-                            </m:oMathParaPr>
-                            <m:oMath xmlns:m="http://schemas.openxmlformats.org/officeDocument/2006/math">
+                            <m:oMath>
                               <m:r>
                                 <a:rPr lang="en-US" i="1">
                                   <a:latin typeface="Cambria Math" panose="02040503050406030204" pitchFamily="18" charset="0"/>
@@ -40483,10 +40792,7 @@
                       <a:pPr/>
                       <a14:m>
                         <m:oMathPara xmlns:m="http://schemas.openxmlformats.org/officeDocument/2006/math">
-                          <m:oMathParaPr>
-                            <m:jc m:val="centerGroup"/>
-                          </m:oMathParaPr>
-                          <m:oMath xmlns:m="http://schemas.openxmlformats.org/officeDocument/2006/math">
+                          <m:oMath>
                             <m:sSup>
                               <m:sSupPr>
                                 <m:ctrlPr>
@@ -40644,10 +40950,7 @@
                     <a:pPr/>
                     <a14:m>
                       <m:oMathPara xmlns:m="http://schemas.openxmlformats.org/officeDocument/2006/math">
-                        <m:oMathParaPr>
-                          <m:jc m:val="centerGroup"/>
-                        </m:oMathParaPr>
-                        <m:oMath xmlns:m="http://schemas.openxmlformats.org/officeDocument/2006/math">
+                        <m:oMath>
                           <m:r>
                             <a:rPr lang="en-US" b="0" i="1" smtClean="0">
                               <a:latin typeface="Cambria Math" panose="02040503050406030204" pitchFamily="18" charset="0"/>
@@ -40741,10 +41044,7 @@
                   <a:pPr/>
                   <a14:m>
                     <m:oMathPara xmlns:m="http://schemas.openxmlformats.org/officeDocument/2006/math">
-                      <m:oMathParaPr>
-                        <m:jc m:val="centerGroup"/>
-                      </m:oMathParaPr>
-                      <m:oMath xmlns:m="http://schemas.openxmlformats.org/officeDocument/2006/math">
+                      <m:oMath>
                         <m:r>
                           <a:rPr lang="en-US" b="0" i="1" smtClean="0">
                             <a:latin typeface="Cambria Math" panose="02040503050406030204" pitchFamily="18" charset="0"/>
@@ -41886,7 +42186,7 @@
                         <m:sSub>
                           <m:sSubPr>
                             <m:ctrlPr>
-                              <a:rPr lang="en-US" i="1" dirty="0" smtClean="0">
+                              <a:rPr lang="en-US" b="1" i="1" dirty="0" smtClean="0">
                                 <a:latin typeface="Cambria Math" panose="02040503050406030204" pitchFamily="18" charset="0"/>
                               </a:rPr>
                             </m:ctrlPr>
@@ -41959,7 +42259,7 @@
                         <m:sSub>
                           <m:sSubPr>
                             <m:ctrlPr>
-                              <a:rPr lang="en-US" b="0" i="1" dirty="0" smtClean="0">
+                              <a:rPr lang="en-US" b="1" i="1" dirty="0" smtClean="0">
                                 <a:latin typeface="Cambria Math" panose="02040503050406030204" pitchFamily="18" charset="0"/>
                               </a:rPr>
                             </m:ctrlPr>
@@ -42032,7 +42332,7 @@
                         <m:sSub>
                           <m:sSubPr>
                             <m:ctrlPr>
-                              <a:rPr lang="en-US" i="1" dirty="0" smtClean="0">
+                              <a:rPr lang="en-US" b="1" i="1" dirty="0" smtClean="0">
                                 <a:latin typeface="Cambria Math" panose="02040503050406030204" pitchFamily="18" charset="0"/>
                               </a:rPr>
                             </m:ctrlPr>
@@ -42098,7 +42398,7 @@
                     <m:sSub>
                       <m:sSubPr>
                         <m:ctrlPr>
-                          <a:rPr lang="en-US" i="1" dirty="0" smtClean="0">
+                          <a:rPr lang="en-US" b="1" i="1" dirty="0" smtClean="0">
                             <a:latin typeface="Cambria Math" panose="02040503050406030204" pitchFamily="18" charset="0"/>
                           </a:rPr>
                         </m:ctrlPr>
@@ -42188,7 +42488,7 @@
                       <a:rPr lang="en-US" b="0" i="1" smtClean="0">
                         <a:latin typeface="Cambria Math" panose="02040503050406030204" pitchFamily="18" charset="0"/>
                       </a:rPr>
-                      <m:t>h</m:t>
+                      <m:t>ℎ</m:t>
                     </m:r>
                     <m:r>
                       <a:rPr lang="en-US" b="0" i="1" smtClean="0">
@@ -42263,12 +42563,12 @@
                       <a:rPr lang="en-US" i="1" dirty="0" smtClean="0">
                         <a:latin typeface="Cambria Math" panose="02040503050406030204" pitchFamily="18" charset="0"/>
                       </a:rPr>
-                      <m:t>h</m:t>
+                      <m:t>ℎ</m:t>
                     </m:r>
                     <m:d>
                       <m:dPr>
                         <m:ctrlPr>
-                          <a:rPr lang="en-US" i="1" dirty="0" smtClean="0">
+                          <a:rPr lang="en-US" i="1" dirty="0" err="1" smtClean="0">
                             <a:latin typeface="Cambria Math" panose="02040503050406030204" pitchFamily="18" charset="0"/>
                           </a:rPr>
                         </m:ctrlPr>
@@ -42277,7 +42577,7 @@
                         <m:sSub>
                           <m:sSubPr>
                             <m:ctrlPr>
-                              <a:rPr lang="en-US" i="1" dirty="0" err="1" smtClean="0">
+                              <a:rPr lang="en-US" b="1" i="1" dirty="0" err="1" smtClean="0">
                                 <a:latin typeface="Cambria Math" panose="02040503050406030204" pitchFamily="18" charset="0"/>
                               </a:rPr>
                             </m:ctrlPr>
@@ -42393,7 +42693,7 @@
                       <a:rPr lang="en-US" i="1" dirty="0">
                         <a:latin typeface="Cambria Math" panose="02040503050406030204" pitchFamily="18" charset="0"/>
                       </a:rPr>
-                      <m:t>h</m:t>
+                      <m:t>ℎ</m:t>
                     </m:r>
                   </m:oMath>
                 </a14:m>
@@ -42822,7 +43122,7 @@
               </a:ln>
               <a:extLst>
                 <a:ext uri="{AF507438-7753-43e0-B8FC-AC1667EBCBE1}">
-                  <a14:hiddenEffects xmlns:a14="http://schemas.microsoft.com/office/drawing/2010/main" xmlns="">
+                  <a14:hiddenEffects xmlns="" xmlns:a14="http://schemas.microsoft.com/office/drawing/2010/main">
                     <a:effectLst>
                       <a:outerShdw dist="35921" dir="2700000" algn="ctr" rotWithShape="0">
                         <a:schemeClr val="bg2"/>
@@ -42904,14 +43204,14 @@
               <a:effectLst/>
               <a:extLst>
                 <a:ext uri="{909E8E84-426E-40dd-AFC4-6F175D3DCCD1}">
-                  <a14:hiddenFill xmlns:a14="http://schemas.microsoft.com/office/drawing/2010/main" xmlns="">
+                  <a14:hiddenFill xmlns="" xmlns:a14="http://schemas.microsoft.com/office/drawing/2010/main">
                     <a:solidFill>
                       <a:schemeClr val="accent1"/>
                     </a:solidFill>
                   </a14:hiddenFill>
                 </a:ext>
                 <a:ext uri="{91240B29-F687-4f45-9708-019B960494DF}">
-                  <a14:hiddenLine xmlns:a14="http://schemas.microsoft.com/office/drawing/2010/main" xmlns="" w="9525">
+                  <a14:hiddenLine xmlns="" xmlns:a14="http://schemas.microsoft.com/office/drawing/2010/main" w="9525">
                     <a:solidFill>
                       <a:schemeClr val="tx1"/>
                     </a:solidFill>
@@ -42921,7 +43221,7 @@
                   </a14:hiddenLine>
                 </a:ext>
                 <a:ext uri="{AF507438-7753-43e0-B8FC-AC1667EBCBE1}">
-                  <a14:hiddenEffects xmlns:a14="http://schemas.microsoft.com/office/drawing/2010/main" xmlns="">
+                  <a14:hiddenEffects xmlns="" xmlns:a14="http://schemas.microsoft.com/office/drawing/2010/main">
                     <a:effectLst>
                       <a:outerShdw dist="35921" dir="2700000" algn="ctr" rotWithShape="0">
                         <a:schemeClr val="bg2"/>
@@ -42962,7 +43262,7 @@
               <a:effectLst/>
               <a:extLst>
                 <a:ext uri="{AF507438-7753-43e0-B8FC-AC1667EBCBE1}">
-                  <a14:hiddenEffects xmlns:a14="http://schemas.microsoft.com/office/drawing/2010/main" xmlns="">
+                  <a14:hiddenEffects xmlns="" xmlns:a14="http://schemas.microsoft.com/office/drawing/2010/main">
                     <a:effectLst>
                       <a:outerShdw dist="35921" dir="2700000" algn="ctr" rotWithShape="0">
                         <a:schemeClr val="bg2"/>
@@ -43010,7 +43310,7 @@
               <a:effectLst/>
               <a:extLst>
                 <a:ext uri="{AF507438-7753-43e0-B8FC-AC1667EBCBE1}">
-                  <a14:hiddenEffects xmlns:a14="http://schemas.microsoft.com/office/drawing/2010/main" xmlns="">
+                  <a14:hiddenEffects xmlns="" xmlns:a14="http://schemas.microsoft.com/office/drawing/2010/main">
                     <a:effectLst>
                       <a:outerShdw dist="35921" dir="2700000" algn="ctr" rotWithShape="0">
                         <a:schemeClr val="bg2"/>
@@ -43078,14 +43378,14 @@
               <a:effectLst/>
               <a:extLst>
                 <a:ext uri="{909E8E84-426E-40dd-AFC4-6F175D3DCCD1}">
-                  <a14:hiddenFill xmlns:a14="http://schemas.microsoft.com/office/drawing/2010/main" xmlns="">
+                  <a14:hiddenFill xmlns="" xmlns:a14="http://schemas.microsoft.com/office/drawing/2010/main">
                     <a:solidFill>
                       <a:schemeClr val="accent1"/>
                     </a:solidFill>
                   </a14:hiddenFill>
                 </a:ext>
                 <a:ext uri="{91240B29-F687-4f45-9708-019B960494DF}">
-                  <a14:hiddenLine xmlns:a14="http://schemas.microsoft.com/office/drawing/2010/main" xmlns="" w="9525">
+                  <a14:hiddenLine xmlns="" xmlns:a14="http://schemas.microsoft.com/office/drawing/2010/main" w="9525">
                     <a:solidFill>
                       <a:schemeClr val="tx1"/>
                     </a:solidFill>
@@ -43095,7 +43395,7 @@
                   </a14:hiddenLine>
                 </a:ext>
                 <a:ext uri="{AF507438-7753-43e0-B8FC-AC1667EBCBE1}">
-                  <a14:hiddenEffects xmlns:a14="http://schemas.microsoft.com/office/drawing/2010/main" xmlns="">
+                  <a14:hiddenEffects xmlns="" xmlns:a14="http://schemas.microsoft.com/office/drawing/2010/main">
                     <a:effectLst>
                       <a:outerShdw dist="35921" dir="2700000" algn="ctr" rotWithShape="0">
                         <a:schemeClr val="bg2"/>
@@ -43139,10 +43439,7 @@
                     <a:pPr/>
                     <a14:m>
                       <m:oMathPara xmlns:m="http://schemas.openxmlformats.org/officeDocument/2006/math">
-                        <m:oMathParaPr>
-                          <m:jc m:val="centerGroup"/>
-                        </m:oMathParaPr>
-                        <m:oMath xmlns:m="http://schemas.openxmlformats.org/officeDocument/2006/math">
+                        <m:oMath>
                           <m:r>
                             <a:rPr lang="en-US" sz="2400" b="0" i="1" dirty="0" smtClean="0">
                               <a:latin typeface="Cambria Math" panose="02040503050406030204" pitchFamily="18" charset="0"/>
@@ -43855,12 +44152,12 @@
                       <a:rPr lang="en-US" i="1" dirty="0">
                         <a:latin typeface="Cambria Math" panose="02040503050406030204" pitchFamily="18" charset="0"/>
                       </a:rPr>
-                      <m:t>h</m:t>
+                      <m:t>ℎ</m:t>
                     </m:r>
                     <m:d>
                       <m:dPr>
                         <m:ctrlPr>
-                          <a:rPr lang="en-US" i="1" dirty="0">
+                          <a:rPr lang="en-US" i="1" dirty="0" err="1">
                             <a:latin typeface="Cambria Math" panose="02040503050406030204" pitchFamily="18" charset="0"/>
                           </a:rPr>
                         </m:ctrlPr>
@@ -44788,7 +45085,7 @@
                         <m:sSub>
                           <m:sSubPr>
                             <m:ctrlPr>
-                              <a:rPr lang="en-US" sz="2400" i="1" dirty="0">
+                              <a:rPr lang="en-US" sz="2400" b="1" i="1" dirty="0">
                                 <a:latin typeface="Cambria Math" panose="02040503050406030204" pitchFamily="18" charset="0"/>
                               </a:rPr>
                             </m:ctrlPr>
@@ -44861,7 +45158,7 @@
                         <m:sSub>
                           <m:sSubPr>
                             <m:ctrlPr>
-                              <a:rPr lang="en-US" sz="2400" i="1" dirty="0">
+                              <a:rPr lang="en-US" sz="2400" b="1" i="1" dirty="0">
                                 <a:latin typeface="Cambria Math" panose="02040503050406030204" pitchFamily="18" charset="0"/>
                               </a:rPr>
                             </m:ctrlPr>
@@ -44934,7 +45231,7 @@
                         <m:sSub>
                           <m:sSubPr>
                             <m:ctrlPr>
-                              <a:rPr lang="en-US" sz="2400" i="1" dirty="0">
+                              <a:rPr lang="en-US" sz="2400" b="1" i="1" dirty="0">
                                 <a:latin typeface="Cambria Math" panose="02040503050406030204" pitchFamily="18" charset="0"/>
                               </a:rPr>
                             </m:ctrlPr>
@@ -45034,12 +45331,12 @@
                       <a:rPr lang="en-US" sz="2400" i="1" dirty="0">
                         <a:latin typeface="Cambria Math" panose="02040503050406030204" pitchFamily="18" charset="0"/>
                       </a:rPr>
-                      <m:t>h</m:t>
+                      <m:t>ℎ</m:t>
                     </m:r>
                     <m:d>
                       <m:dPr>
                         <m:ctrlPr>
-                          <a:rPr lang="en-US" sz="2400" i="1" dirty="0">
+                          <a:rPr lang="en-US" sz="2400" b="1" i="1" dirty="0" smtClean="0">
                             <a:latin typeface="Cambria Math" panose="02040503050406030204" pitchFamily="18" charset="0"/>
                           </a:rPr>
                         </m:ctrlPr>
@@ -45186,7 +45483,7 @@
                       <a:rPr lang="en-US" sz="2400" b="0" i="1" smtClean="0">
                         <a:latin typeface="Cambria Math" panose="02040503050406030204" pitchFamily="18" charset="0"/>
                       </a:rPr>
-                      <m:t>h</m:t>
+                      <m:t>ℎ</m:t>
                     </m:r>
                     <m:r>
                       <a:rPr lang="en-US" sz="2400" b="0" i="1" smtClean="0">
@@ -46085,7 +46382,7 @@
             </a:ln>
             <a:extLst>
               <a:ext uri="{AF507438-7753-43e0-B8FC-AC1667EBCBE1}">
-                <a14:hiddenEffects xmlns:a14="http://schemas.microsoft.com/office/drawing/2010/main" xmlns="">
+                <a14:hiddenEffects xmlns="" xmlns:a14="http://schemas.microsoft.com/office/drawing/2010/main">
                   <a:effectLst>
                     <a:outerShdw dist="35921" dir="2700000" algn="ctr" rotWithShape="0">
                       <a:schemeClr val="bg2"/>
@@ -46153,7 +46450,7 @@
             <a:effectLst/>
             <a:extLst>
               <a:ext uri="{AF507438-7753-43e0-B8FC-AC1667EBCBE1}">
-                <a14:hiddenEffects xmlns:a14="http://schemas.microsoft.com/office/drawing/2010/main" xmlns="">
+                <a14:hiddenEffects xmlns="" xmlns:a14="http://schemas.microsoft.com/office/drawing/2010/main">
                   <a:effectLst>
                     <a:outerShdw dist="35921" dir="2700000" algn="ctr" rotWithShape="0">
                       <a:schemeClr val="bg2"/>
@@ -46207,7 +46504,7 @@
             <a:effectLst/>
             <a:extLst>
               <a:ext uri="{AF507438-7753-43e0-B8FC-AC1667EBCBE1}">
-                <a14:hiddenEffects xmlns:a14="http://schemas.microsoft.com/office/drawing/2010/main" xmlns="">
+                <a14:hiddenEffects xmlns="" xmlns:a14="http://schemas.microsoft.com/office/drawing/2010/main">
                   <a:effectLst>
                     <a:outerShdw dist="35921" dir="2700000" algn="ctr" rotWithShape="0">
                       <a:schemeClr val="bg2"/>
@@ -46260,12 +46557,12 @@
             <a:effectLst/>
             <a:extLst>
               <a:ext uri="{909E8E84-426E-40dd-AFC4-6F175D3DCCD1}">
-                <a14:hiddenFill xmlns:a14="http://schemas.microsoft.com/office/drawing/2010/main" xmlns="">
+                <a14:hiddenFill xmlns="" xmlns:a14="http://schemas.microsoft.com/office/drawing/2010/main">
                   <a:noFill/>
                 </a14:hiddenFill>
               </a:ext>
               <a:ext uri="{AF507438-7753-43e0-B8FC-AC1667EBCBE1}">
-                <a14:hiddenEffects xmlns:a14="http://schemas.microsoft.com/office/drawing/2010/main" xmlns="">
+                <a14:hiddenEffects xmlns="" xmlns:a14="http://schemas.microsoft.com/office/drawing/2010/main">
                   <a:effectLst>
                     <a:outerShdw dist="35921" dir="2700000" algn="ctr" rotWithShape="0">
                       <a:schemeClr val="bg2"/>
@@ -46339,14 +46636,14 @@
             <a:effectLst/>
             <a:extLst>
               <a:ext uri="{909E8E84-426E-40dd-AFC4-6F175D3DCCD1}">
-                <a14:hiddenFill xmlns:a14="http://schemas.microsoft.com/office/drawing/2010/main" xmlns="">
+                <a14:hiddenFill xmlns="" xmlns:a14="http://schemas.microsoft.com/office/drawing/2010/main">
                   <a:solidFill>
                     <a:schemeClr val="accent1"/>
                   </a:solidFill>
                 </a14:hiddenFill>
               </a:ext>
               <a:ext uri="{91240B29-F687-4f45-9708-019B960494DF}">
-                <a14:hiddenLine xmlns:a14="http://schemas.microsoft.com/office/drawing/2010/main" xmlns="" w="9525">
+                <a14:hiddenLine xmlns="" xmlns:a14="http://schemas.microsoft.com/office/drawing/2010/main" w="9525">
                   <a:solidFill>
                     <a:schemeClr val="tx1"/>
                   </a:solidFill>
@@ -46356,7 +46653,7 @@
                 </a14:hiddenLine>
               </a:ext>
               <a:ext uri="{AF507438-7753-43e0-B8FC-AC1667EBCBE1}">
-                <a14:hiddenEffects xmlns:a14="http://schemas.microsoft.com/office/drawing/2010/main" xmlns="">
+                <a14:hiddenEffects xmlns="" xmlns:a14="http://schemas.microsoft.com/office/drawing/2010/main">
                   <a:effectLst>
                     <a:outerShdw dist="35921" dir="2700000" algn="ctr" rotWithShape="0">
                       <a:schemeClr val="bg2"/>
@@ -46400,10 +46697,7 @@
                   <a:pPr/>
                   <a14:m>
                     <m:oMathPara xmlns:m="http://schemas.openxmlformats.org/officeDocument/2006/math">
-                      <m:oMathParaPr>
-                        <m:jc m:val="centerGroup"/>
-                      </m:oMathParaPr>
-                      <m:oMath xmlns:m="http://schemas.openxmlformats.org/officeDocument/2006/math">
+                      <m:oMath>
                         <m:r>
                           <a:rPr lang="en-US" sz="2400" b="0" i="1" dirty="0" smtClean="0">
                             <a:latin typeface="Cambria Math" panose="02040503050406030204" pitchFamily="18" charset="0"/>
@@ -46496,10 +46790,7 @@
                   <a:pPr/>
                   <a14:m>
                     <m:oMathPara xmlns:m="http://schemas.openxmlformats.org/officeDocument/2006/math">
-                      <m:oMathParaPr>
-                        <m:jc m:val="centerGroup"/>
-                      </m:oMathParaPr>
-                      <m:oMath xmlns:m="http://schemas.openxmlformats.org/officeDocument/2006/math">
+                      <m:oMath>
                         <m:sSup>
                           <m:sSupPr>
                             <m:ctrlPr>
@@ -46513,7 +46804,7 @@
                               <a:rPr lang="en-US" sz="3200" b="0" i="1" smtClean="0">
                                 <a:latin typeface="Cambria Math" panose="02040503050406030204" pitchFamily="18" charset="0"/>
                               </a:rPr>
-                              <m:t>h</m:t>
+                              <m:t>ℎ</m:t>
                             </m:r>
                           </m:e>
                           <m:sup>
